--- a/唯有耶穌(崇拜版).pptx
+++ b/唯有耶穌(崇拜版).pptx
@@ -11,18 +11,6 @@
     <p:sldId id="267" r:id="rId5"/>
     <p:sldId id="268" r:id="rId6"/>
     <p:sldId id="269" r:id="rId7"/>
-    <p:sldId id="270" r:id="rId8"/>
-    <p:sldId id="271" r:id="rId9"/>
-    <p:sldId id="272" r:id="rId10"/>
-    <p:sldId id="273" r:id="rId11"/>
-    <p:sldId id="274" r:id="rId12"/>
-    <p:sldId id="275" r:id="rId13"/>
-    <p:sldId id="276" r:id="rId14"/>
-    <p:sldId id="277" r:id="rId15"/>
-    <p:sldId id="278" r:id="rId16"/>
-    <p:sldId id="279" r:id="rId17"/>
-    <p:sldId id="280" r:id="rId18"/>
-    <p:sldId id="281" r:id="rId19"/>
   </p:sldIdLst>
   <p:sldSz cx="12192000" cy="6858000"/>
   <p:notesSz cx="6858000" cy="9144000"/>
@@ -123,7 +111,7 @@
   </p:defaultTextStyle>
   <p:extLst>
     <p:ext uri="{EFAFB233-063F-42B5-8137-9DF3F51BA10A}">
-      <p15:sldGuideLst xmlns="" xmlns:p15="http://schemas.microsoft.com/office/powerpoint/2012/main">
+      <p15:sldGuideLst xmlns:p15="http://schemas.microsoft.com/office/powerpoint/2012/main">
         <p15:guide id="1" orient="horz" pos="2160" userDrawn="1">
           <p15:clr>
             <a:srgbClr val="A4A3A4"/>
@@ -178,10 +166,9 @@
           <a:lstStyle/>
           <a:p>
             <a:r>
-              <a:rPr lang="zh-TW" altLang="en-US" smtClean="0"/>
+              <a:rPr lang="zh-TW" altLang="en-US"/>
               <a:t>按一下以編輯母片標題樣式</a:t>
             </a:r>
-            <a:endParaRPr lang="zh-TW" altLang="en-US"/>
           </a:p>
         </p:txBody>
       </p:sp>
@@ -297,10 +284,9 @@
           </a:lstStyle>
           <a:p>
             <a:r>
-              <a:rPr lang="zh-TW" altLang="en-US" smtClean="0"/>
+              <a:rPr lang="zh-TW" altLang="en-US"/>
               <a:t>按一下以編輯母片副標題樣式</a:t>
             </a:r>
-            <a:endParaRPr lang="zh-TW" altLang="en-US"/>
           </a:p>
         </p:txBody>
       </p:sp>
@@ -322,7 +308,7 @@
             <a:fld id="{49CD2A50-85AC-4EAF-B333-6B51C447FC29}" type="datetimeFigureOut">
               <a:rPr lang="zh-TW" altLang="en-US" smtClean="0"/>
               <a:pPr/>
-              <a:t>2023/11/23</a:t>
+              <a:t>2024/6/22</a:t>
             </a:fld>
             <a:endParaRPr lang="zh-TW" altLang="en-US"/>
           </a:p>
@@ -412,10 +398,9 @@
           <a:lstStyle/>
           <a:p>
             <a:r>
-              <a:rPr lang="zh-TW" altLang="en-US" smtClean="0"/>
+              <a:rPr lang="zh-TW" altLang="en-US"/>
               <a:t>按一下以編輯母片標題樣式</a:t>
             </a:r>
-            <a:endParaRPr lang="zh-TW" altLang="en-US"/>
           </a:p>
         </p:txBody>
       </p:sp>
@@ -436,38 +421,37 @@
           <a:p>
             <a:pPr lvl="0"/>
             <a:r>
-              <a:rPr lang="zh-TW" altLang="en-US" smtClean="0"/>
+              <a:rPr lang="zh-TW" altLang="en-US"/>
               <a:t>按一下以編輯母片文字樣式</a:t>
             </a:r>
           </a:p>
           <a:p>
             <a:pPr lvl="1"/>
             <a:r>
-              <a:rPr lang="zh-TW" altLang="en-US" smtClean="0"/>
+              <a:rPr lang="zh-TW" altLang="en-US"/>
               <a:t>第二層</a:t>
             </a:r>
           </a:p>
           <a:p>
             <a:pPr lvl="2"/>
             <a:r>
-              <a:rPr lang="zh-TW" altLang="en-US" smtClean="0"/>
+              <a:rPr lang="zh-TW" altLang="en-US"/>
               <a:t>第三層</a:t>
             </a:r>
           </a:p>
           <a:p>
             <a:pPr lvl="3"/>
             <a:r>
-              <a:rPr lang="zh-TW" altLang="en-US" smtClean="0"/>
+              <a:rPr lang="zh-TW" altLang="en-US"/>
               <a:t>第四層</a:t>
             </a:r>
           </a:p>
           <a:p>
             <a:pPr lvl="4"/>
             <a:r>
-              <a:rPr lang="zh-TW" altLang="en-US" smtClean="0"/>
+              <a:rPr lang="zh-TW" altLang="en-US"/>
               <a:t>第五層</a:t>
             </a:r>
-            <a:endParaRPr lang="zh-TW" altLang="en-US"/>
           </a:p>
         </p:txBody>
       </p:sp>
@@ -489,7 +473,7 @@
             <a:fld id="{49CD2A50-85AC-4EAF-B333-6B51C447FC29}" type="datetimeFigureOut">
               <a:rPr lang="zh-TW" altLang="en-US" smtClean="0"/>
               <a:pPr/>
-              <a:t>2023/11/23</a:t>
+              <a:t>2024/6/22</a:t>
             </a:fld>
             <a:endParaRPr lang="zh-TW" altLang="en-US"/>
           </a:p>
@@ -584,10 +568,9 @@
           <a:lstStyle/>
           <a:p>
             <a:r>
-              <a:rPr lang="zh-TW" altLang="en-US" smtClean="0"/>
+              <a:rPr lang="zh-TW" altLang="en-US"/>
               <a:t>按一下以編輯母片標題樣式</a:t>
             </a:r>
-            <a:endParaRPr lang="zh-TW" altLang="en-US"/>
           </a:p>
         </p:txBody>
       </p:sp>
@@ -613,38 +596,37 @@
           <a:p>
             <a:pPr lvl="0"/>
             <a:r>
-              <a:rPr lang="zh-TW" altLang="en-US" smtClean="0"/>
+              <a:rPr lang="zh-TW" altLang="en-US"/>
               <a:t>按一下以編輯母片文字樣式</a:t>
             </a:r>
           </a:p>
           <a:p>
             <a:pPr lvl="1"/>
             <a:r>
-              <a:rPr lang="zh-TW" altLang="en-US" smtClean="0"/>
+              <a:rPr lang="zh-TW" altLang="en-US"/>
               <a:t>第二層</a:t>
             </a:r>
           </a:p>
           <a:p>
             <a:pPr lvl="2"/>
             <a:r>
-              <a:rPr lang="zh-TW" altLang="en-US" smtClean="0"/>
+              <a:rPr lang="zh-TW" altLang="en-US"/>
               <a:t>第三層</a:t>
             </a:r>
           </a:p>
           <a:p>
             <a:pPr lvl="3"/>
             <a:r>
-              <a:rPr lang="zh-TW" altLang="en-US" smtClean="0"/>
+              <a:rPr lang="zh-TW" altLang="en-US"/>
               <a:t>第四層</a:t>
             </a:r>
           </a:p>
           <a:p>
             <a:pPr lvl="4"/>
             <a:r>
-              <a:rPr lang="zh-TW" altLang="en-US" smtClean="0"/>
+              <a:rPr lang="zh-TW" altLang="en-US"/>
               <a:t>第五層</a:t>
             </a:r>
-            <a:endParaRPr lang="zh-TW" altLang="en-US"/>
           </a:p>
         </p:txBody>
       </p:sp>
@@ -666,7 +648,7 @@
             <a:fld id="{49CD2A50-85AC-4EAF-B333-6B51C447FC29}" type="datetimeFigureOut">
               <a:rPr lang="zh-TW" altLang="en-US" smtClean="0"/>
               <a:pPr/>
-              <a:t>2023/11/23</a:t>
+              <a:t>2024/6/22</a:t>
             </a:fld>
             <a:endParaRPr lang="zh-TW" altLang="en-US"/>
           </a:p>
@@ -756,10 +738,9 @@
           <a:lstStyle/>
           <a:p>
             <a:r>
-              <a:rPr lang="zh-TW" altLang="en-US" smtClean="0"/>
+              <a:rPr lang="zh-TW" altLang="en-US"/>
               <a:t>按一下以編輯母片標題樣式</a:t>
             </a:r>
-            <a:endParaRPr lang="zh-TW" altLang="en-US"/>
           </a:p>
         </p:txBody>
       </p:sp>
@@ -780,38 +761,37 @@
           <a:p>
             <a:pPr lvl="0"/>
             <a:r>
-              <a:rPr lang="zh-TW" altLang="en-US" smtClean="0"/>
+              <a:rPr lang="zh-TW" altLang="en-US"/>
               <a:t>按一下以編輯母片文字樣式</a:t>
             </a:r>
           </a:p>
           <a:p>
             <a:pPr lvl="1"/>
             <a:r>
-              <a:rPr lang="zh-TW" altLang="en-US" smtClean="0"/>
+              <a:rPr lang="zh-TW" altLang="en-US"/>
               <a:t>第二層</a:t>
             </a:r>
           </a:p>
           <a:p>
             <a:pPr lvl="2"/>
             <a:r>
-              <a:rPr lang="zh-TW" altLang="en-US" smtClean="0"/>
+              <a:rPr lang="zh-TW" altLang="en-US"/>
               <a:t>第三層</a:t>
             </a:r>
           </a:p>
           <a:p>
             <a:pPr lvl="3"/>
             <a:r>
-              <a:rPr lang="zh-TW" altLang="en-US" smtClean="0"/>
+              <a:rPr lang="zh-TW" altLang="en-US"/>
               <a:t>第四層</a:t>
             </a:r>
           </a:p>
           <a:p>
             <a:pPr lvl="4"/>
             <a:r>
-              <a:rPr lang="zh-TW" altLang="en-US" smtClean="0"/>
+              <a:rPr lang="zh-TW" altLang="en-US"/>
               <a:t>第五層</a:t>
             </a:r>
-            <a:endParaRPr lang="zh-TW" altLang="en-US"/>
           </a:p>
         </p:txBody>
       </p:sp>
@@ -833,7 +813,7 @@
             <a:fld id="{49CD2A50-85AC-4EAF-B333-6B51C447FC29}" type="datetimeFigureOut">
               <a:rPr lang="zh-TW" altLang="en-US" smtClean="0"/>
               <a:pPr/>
-              <a:t>2023/11/23</a:t>
+              <a:t>2024/6/22</a:t>
             </a:fld>
             <a:endParaRPr lang="zh-TW" altLang="en-US"/>
           </a:p>
@@ -932,10 +912,9 @@
           </a:lstStyle>
           <a:p>
             <a:r>
-              <a:rPr lang="zh-TW" altLang="en-US" smtClean="0"/>
+              <a:rPr lang="zh-TW" altLang="en-US"/>
               <a:t>按一下以編輯母片標題樣式</a:t>
             </a:r>
-            <a:endParaRPr lang="zh-TW" altLang="en-US"/>
           </a:p>
         </p:txBody>
       </p:sp>
@@ -1052,7 +1031,7 @@
           <a:p>
             <a:pPr lvl="0"/>
             <a:r>
-              <a:rPr lang="zh-TW" altLang="en-US" smtClean="0"/>
+              <a:rPr lang="zh-TW" altLang="en-US"/>
               <a:t>按一下以編輯母片文字樣式</a:t>
             </a:r>
           </a:p>
@@ -1076,7 +1055,7 @@
             <a:fld id="{49CD2A50-85AC-4EAF-B333-6B51C447FC29}" type="datetimeFigureOut">
               <a:rPr lang="zh-TW" altLang="en-US" smtClean="0"/>
               <a:pPr/>
-              <a:t>2023/11/23</a:t>
+              <a:t>2024/6/22</a:t>
             </a:fld>
             <a:endParaRPr lang="zh-TW" altLang="en-US"/>
           </a:p>
@@ -1166,10 +1145,9 @@
           <a:lstStyle/>
           <a:p>
             <a:r>
-              <a:rPr lang="zh-TW" altLang="en-US" smtClean="0"/>
+              <a:rPr lang="zh-TW" altLang="en-US"/>
               <a:t>按一下以編輯母片標題樣式</a:t>
             </a:r>
-            <a:endParaRPr lang="zh-TW" altLang="en-US"/>
           </a:p>
         </p:txBody>
       </p:sp>
@@ -1223,38 +1201,37 @@
           <a:p>
             <a:pPr lvl="0"/>
             <a:r>
-              <a:rPr lang="zh-TW" altLang="en-US" smtClean="0"/>
+              <a:rPr lang="zh-TW" altLang="en-US"/>
               <a:t>按一下以編輯母片文字樣式</a:t>
             </a:r>
           </a:p>
           <a:p>
             <a:pPr lvl="1"/>
             <a:r>
-              <a:rPr lang="zh-TW" altLang="en-US" smtClean="0"/>
+              <a:rPr lang="zh-TW" altLang="en-US"/>
               <a:t>第二層</a:t>
             </a:r>
           </a:p>
           <a:p>
             <a:pPr lvl="2"/>
             <a:r>
-              <a:rPr lang="zh-TW" altLang="en-US" smtClean="0"/>
+              <a:rPr lang="zh-TW" altLang="en-US"/>
               <a:t>第三層</a:t>
             </a:r>
           </a:p>
           <a:p>
             <a:pPr lvl="3"/>
             <a:r>
-              <a:rPr lang="zh-TW" altLang="en-US" smtClean="0"/>
+              <a:rPr lang="zh-TW" altLang="en-US"/>
               <a:t>第四層</a:t>
             </a:r>
           </a:p>
           <a:p>
             <a:pPr lvl="4"/>
             <a:r>
-              <a:rPr lang="zh-TW" altLang="en-US" smtClean="0"/>
+              <a:rPr lang="zh-TW" altLang="en-US"/>
               <a:t>第五層</a:t>
             </a:r>
-            <a:endParaRPr lang="zh-TW" altLang="en-US"/>
           </a:p>
         </p:txBody>
       </p:sp>
@@ -1308,38 +1285,37 @@
           <a:p>
             <a:pPr lvl="0"/>
             <a:r>
-              <a:rPr lang="zh-TW" altLang="en-US" smtClean="0"/>
+              <a:rPr lang="zh-TW" altLang="en-US"/>
               <a:t>按一下以編輯母片文字樣式</a:t>
             </a:r>
           </a:p>
           <a:p>
             <a:pPr lvl="1"/>
             <a:r>
-              <a:rPr lang="zh-TW" altLang="en-US" smtClean="0"/>
+              <a:rPr lang="zh-TW" altLang="en-US"/>
               <a:t>第二層</a:t>
             </a:r>
           </a:p>
           <a:p>
             <a:pPr lvl="2"/>
             <a:r>
-              <a:rPr lang="zh-TW" altLang="en-US" smtClean="0"/>
+              <a:rPr lang="zh-TW" altLang="en-US"/>
               <a:t>第三層</a:t>
             </a:r>
           </a:p>
           <a:p>
             <a:pPr lvl="3"/>
             <a:r>
-              <a:rPr lang="zh-TW" altLang="en-US" smtClean="0"/>
+              <a:rPr lang="zh-TW" altLang="en-US"/>
               <a:t>第四層</a:t>
             </a:r>
           </a:p>
           <a:p>
             <a:pPr lvl="4"/>
             <a:r>
-              <a:rPr lang="zh-TW" altLang="en-US" smtClean="0"/>
+              <a:rPr lang="zh-TW" altLang="en-US"/>
               <a:t>第五層</a:t>
             </a:r>
-            <a:endParaRPr lang="zh-TW" altLang="en-US"/>
           </a:p>
         </p:txBody>
       </p:sp>
@@ -1361,7 +1337,7 @@
             <a:fld id="{49CD2A50-85AC-4EAF-B333-6B51C447FC29}" type="datetimeFigureOut">
               <a:rPr lang="zh-TW" altLang="en-US" smtClean="0"/>
               <a:pPr/>
-              <a:t>2023/11/23</a:t>
+              <a:t>2024/6/22</a:t>
             </a:fld>
             <a:endParaRPr lang="zh-TW" altLang="en-US"/>
           </a:p>
@@ -1455,10 +1431,9 @@
           </a:lstStyle>
           <a:p>
             <a:r>
-              <a:rPr lang="zh-TW" altLang="en-US" smtClean="0"/>
+              <a:rPr lang="zh-TW" altLang="en-US"/>
               <a:t>按一下以編輯母片標題樣式</a:t>
             </a:r>
-            <a:endParaRPr lang="zh-TW" altLang="en-US"/>
           </a:p>
         </p:txBody>
       </p:sp>
@@ -1521,7 +1496,7 @@
           <a:p>
             <a:pPr lvl="0"/>
             <a:r>
-              <a:rPr lang="zh-TW" altLang="en-US" smtClean="0"/>
+              <a:rPr lang="zh-TW" altLang="en-US"/>
               <a:t>按一下以編輯母片文字樣式</a:t>
             </a:r>
           </a:p>
@@ -1577,38 +1552,37 @@
           <a:p>
             <a:pPr lvl="0"/>
             <a:r>
-              <a:rPr lang="zh-TW" altLang="en-US" smtClean="0"/>
+              <a:rPr lang="zh-TW" altLang="en-US"/>
               <a:t>按一下以編輯母片文字樣式</a:t>
             </a:r>
           </a:p>
           <a:p>
             <a:pPr lvl="1"/>
             <a:r>
-              <a:rPr lang="zh-TW" altLang="en-US" smtClean="0"/>
+              <a:rPr lang="zh-TW" altLang="en-US"/>
               <a:t>第二層</a:t>
             </a:r>
           </a:p>
           <a:p>
             <a:pPr lvl="2"/>
             <a:r>
-              <a:rPr lang="zh-TW" altLang="en-US" smtClean="0"/>
+              <a:rPr lang="zh-TW" altLang="en-US"/>
               <a:t>第三層</a:t>
             </a:r>
           </a:p>
           <a:p>
             <a:pPr lvl="3"/>
             <a:r>
-              <a:rPr lang="zh-TW" altLang="en-US" smtClean="0"/>
+              <a:rPr lang="zh-TW" altLang="en-US"/>
               <a:t>第四層</a:t>
             </a:r>
           </a:p>
           <a:p>
             <a:pPr lvl="4"/>
             <a:r>
-              <a:rPr lang="zh-TW" altLang="en-US" smtClean="0"/>
+              <a:rPr lang="zh-TW" altLang="en-US"/>
               <a:t>第五層</a:t>
             </a:r>
-            <a:endParaRPr lang="zh-TW" altLang="en-US"/>
           </a:p>
         </p:txBody>
       </p:sp>
@@ -1671,7 +1645,7 @@
           <a:p>
             <a:pPr lvl="0"/>
             <a:r>
-              <a:rPr lang="zh-TW" altLang="en-US" smtClean="0"/>
+              <a:rPr lang="zh-TW" altLang="en-US"/>
               <a:t>按一下以編輯母片文字樣式</a:t>
             </a:r>
           </a:p>
@@ -1727,38 +1701,37 @@
           <a:p>
             <a:pPr lvl="0"/>
             <a:r>
-              <a:rPr lang="zh-TW" altLang="en-US" smtClean="0"/>
+              <a:rPr lang="zh-TW" altLang="en-US"/>
               <a:t>按一下以編輯母片文字樣式</a:t>
             </a:r>
           </a:p>
           <a:p>
             <a:pPr lvl="1"/>
             <a:r>
-              <a:rPr lang="zh-TW" altLang="en-US" smtClean="0"/>
+              <a:rPr lang="zh-TW" altLang="en-US"/>
               <a:t>第二層</a:t>
             </a:r>
           </a:p>
           <a:p>
             <a:pPr lvl="2"/>
             <a:r>
-              <a:rPr lang="zh-TW" altLang="en-US" smtClean="0"/>
+              <a:rPr lang="zh-TW" altLang="en-US"/>
               <a:t>第三層</a:t>
             </a:r>
           </a:p>
           <a:p>
             <a:pPr lvl="3"/>
             <a:r>
-              <a:rPr lang="zh-TW" altLang="en-US" smtClean="0"/>
+              <a:rPr lang="zh-TW" altLang="en-US"/>
               <a:t>第四層</a:t>
             </a:r>
           </a:p>
           <a:p>
             <a:pPr lvl="4"/>
             <a:r>
-              <a:rPr lang="zh-TW" altLang="en-US" smtClean="0"/>
+              <a:rPr lang="zh-TW" altLang="en-US"/>
               <a:t>第五層</a:t>
             </a:r>
-            <a:endParaRPr lang="zh-TW" altLang="en-US"/>
           </a:p>
         </p:txBody>
       </p:sp>
@@ -1780,7 +1753,7 @@
             <a:fld id="{49CD2A50-85AC-4EAF-B333-6B51C447FC29}" type="datetimeFigureOut">
               <a:rPr lang="zh-TW" altLang="en-US" smtClean="0"/>
               <a:pPr/>
-              <a:t>2023/11/23</a:t>
+              <a:t>2024/6/22</a:t>
             </a:fld>
             <a:endParaRPr lang="zh-TW" altLang="en-US"/>
           </a:p>
@@ -1870,10 +1843,9 @@
           <a:lstStyle/>
           <a:p>
             <a:r>
-              <a:rPr lang="zh-TW" altLang="en-US" smtClean="0"/>
+              <a:rPr lang="zh-TW" altLang="en-US"/>
               <a:t>按一下以編輯母片標題樣式</a:t>
             </a:r>
-            <a:endParaRPr lang="zh-TW" altLang="en-US"/>
           </a:p>
         </p:txBody>
       </p:sp>
@@ -1895,7 +1867,7 @@
             <a:fld id="{49CD2A50-85AC-4EAF-B333-6B51C447FC29}" type="datetimeFigureOut">
               <a:rPr lang="zh-TW" altLang="en-US" smtClean="0"/>
               <a:pPr/>
-              <a:t>2023/11/23</a:t>
+              <a:t>2024/6/22</a:t>
             </a:fld>
             <a:endParaRPr lang="zh-TW" altLang="en-US"/>
           </a:p>
@@ -1987,7 +1959,7 @@
             <a:fld id="{49CD2A50-85AC-4EAF-B333-6B51C447FC29}" type="datetimeFigureOut">
               <a:rPr lang="zh-TW" altLang="en-US" smtClean="0"/>
               <a:pPr/>
-              <a:t>2023/11/23</a:t>
+              <a:t>2024/6/22</a:t>
             </a:fld>
             <a:endParaRPr lang="zh-TW" altLang="en-US"/>
           </a:p>
@@ -2086,10 +2058,9 @@
           </a:lstStyle>
           <a:p>
             <a:r>
-              <a:rPr lang="zh-TW" altLang="en-US" smtClean="0"/>
+              <a:rPr lang="zh-TW" altLang="en-US"/>
               <a:t>按一下以編輯母片標題樣式</a:t>
             </a:r>
-            <a:endParaRPr lang="zh-TW" altLang="en-US"/>
           </a:p>
         </p:txBody>
       </p:sp>
@@ -2143,38 +2114,37 @@
           <a:p>
             <a:pPr lvl="0"/>
             <a:r>
-              <a:rPr lang="zh-TW" altLang="en-US" smtClean="0"/>
+              <a:rPr lang="zh-TW" altLang="en-US"/>
               <a:t>按一下以編輯母片文字樣式</a:t>
             </a:r>
           </a:p>
           <a:p>
             <a:pPr lvl="1"/>
             <a:r>
-              <a:rPr lang="zh-TW" altLang="en-US" smtClean="0"/>
+              <a:rPr lang="zh-TW" altLang="en-US"/>
               <a:t>第二層</a:t>
             </a:r>
           </a:p>
           <a:p>
             <a:pPr lvl="2"/>
             <a:r>
-              <a:rPr lang="zh-TW" altLang="en-US" smtClean="0"/>
+              <a:rPr lang="zh-TW" altLang="en-US"/>
               <a:t>第三層</a:t>
             </a:r>
           </a:p>
           <a:p>
             <a:pPr lvl="3"/>
             <a:r>
-              <a:rPr lang="zh-TW" altLang="en-US" smtClean="0"/>
+              <a:rPr lang="zh-TW" altLang="en-US"/>
               <a:t>第四層</a:t>
             </a:r>
           </a:p>
           <a:p>
             <a:pPr lvl="4"/>
             <a:r>
-              <a:rPr lang="zh-TW" altLang="en-US" smtClean="0"/>
+              <a:rPr lang="zh-TW" altLang="en-US"/>
               <a:t>第五層</a:t>
             </a:r>
-            <a:endParaRPr lang="zh-TW" altLang="en-US"/>
           </a:p>
         </p:txBody>
       </p:sp>
@@ -2237,7 +2207,7 @@
           <a:p>
             <a:pPr lvl="0"/>
             <a:r>
-              <a:rPr lang="zh-TW" altLang="en-US" smtClean="0"/>
+              <a:rPr lang="zh-TW" altLang="en-US"/>
               <a:t>按一下以編輯母片文字樣式</a:t>
             </a:r>
           </a:p>
@@ -2261,7 +2231,7 @@
             <a:fld id="{49CD2A50-85AC-4EAF-B333-6B51C447FC29}" type="datetimeFigureOut">
               <a:rPr lang="zh-TW" altLang="en-US" smtClean="0"/>
               <a:pPr/>
-              <a:t>2023/11/23</a:t>
+              <a:t>2024/6/22</a:t>
             </a:fld>
             <a:endParaRPr lang="zh-TW" altLang="en-US"/>
           </a:p>
@@ -2360,10 +2330,9 @@
           </a:lstStyle>
           <a:p>
             <a:r>
-              <a:rPr lang="zh-TW" altLang="en-US" smtClean="0"/>
+              <a:rPr lang="zh-TW" altLang="en-US"/>
               <a:t>按一下以編輯母片標題樣式</a:t>
             </a:r>
-            <a:endParaRPr lang="zh-TW" altLang="en-US"/>
           </a:p>
         </p:txBody>
       </p:sp>
@@ -2425,10 +2394,9 @@
           </a:lstStyle>
           <a:p>
             <a:r>
-              <a:rPr lang="zh-TW" altLang="en-US" smtClean="0"/>
+              <a:rPr lang="zh-TW" altLang="en-US"/>
               <a:t>按一下圖示以新增圖片</a:t>
             </a:r>
-            <a:endParaRPr lang="zh-TW" altLang="en-US"/>
           </a:p>
         </p:txBody>
       </p:sp>
@@ -2491,7 +2459,7 @@
           <a:p>
             <a:pPr lvl="0"/>
             <a:r>
-              <a:rPr lang="zh-TW" altLang="en-US" smtClean="0"/>
+              <a:rPr lang="zh-TW" altLang="en-US"/>
               <a:t>按一下以編輯母片文字樣式</a:t>
             </a:r>
           </a:p>
@@ -2515,7 +2483,7 @@
             <a:fld id="{49CD2A50-85AC-4EAF-B333-6B51C447FC29}" type="datetimeFigureOut">
               <a:rPr lang="zh-TW" altLang="en-US" smtClean="0"/>
               <a:pPr/>
-              <a:t>2023/11/23</a:t>
+              <a:t>2024/6/22</a:t>
             </a:fld>
             <a:endParaRPr lang="zh-TW" altLang="en-US"/>
           </a:p>
@@ -2625,10 +2593,9 @@
           <a:lstStyle/>
           <a:p>
             <a:r>
-              <a:rPr lang="zh-TW" altLang="en-US" smtClean="0"/>
+              <a:rPr lang="zh-TW" altLang="en-US"/>
               <a:t>按一下以編輯母片標題樣式</a:t>
             </a:r>
-            <a:endParaRPr lang="zh-TW" altLang="en-US"/>
           </a:p>
         </p:txBody>
       </p:sp>
@@ -2659,38 +2626,37 @@
           <a:p>
             <a:pPr lvl="0"/>
             <a:r>
-              <a:rPr lang="zh-TW" altLang="en-US" smtClean="0"/>
+              <a:rPr lang="zh-TW" altLang="en-US"/>
               <a:t>按一下以編輯母片文字樣式</a:t>
             </a:r>
           </a:p>
           <a:p>
             <a:pPr lvl="1"/>
             <a:r>
-              <a:rPr lang="zh-TW" altLang="en-US" smtClean="0"/>
+              <a:rPr lang="zh-TW" altLang="en-US"/>
               <a:t>第二層</a:t>
             </a:r>
           </a:p>
           <a:p>
             <a:pPr lvl="2"/>
             <a:r>
-              <a:rPr lang="zh-TW" altLang="en-US" smtClean="0"/>
+              <a:rPr lang="zh-TW" altLang="en-US"/>
               <a:t>第三層</a:t>
             </a:r>
           </a:p>
           <a:p>
             <a:pPr lvl="3"/>
             <a:r>
-              <a:rPr lang="zh-TW" altLang="en-US" smtClean="0"/>
+              <a:rPr lang="zh-TW" altLang="en-US"/>
               <a:t>第四層</a:t>
             </a:r>
           </a:p>
           <a:p>
             <a:pPr lvl="4"/>
             <a:r>
-              <a:rPr lang="zh-TW" altLang="en-US" smtClean="0"/>
+              <a:rPr lang="zh-TW" altLang="en-US"/>
               <a:t>第五層</a:t>
             </a:r>
-            <a:endParaRPr lang="zh-TW" altLang="en-US"/>
           </a:p>
         </p:txBody>
       </p:sp>
@@ -2730,7 +2696,7 @@
             <a:fld id="{49CD2A50-85AC-4EAF-B333-6B51C447FC29}" type="datetimeFigureOut">
               <a:rPr lang="zh-TW" altLang="en-US" smtClean="0"/>
               <a:pPr/>
-              <a:t>2023/11/23</a:t>
+              <a:t>2024/6/22</a:t>
             </a:fld>
             <a:endParaRPr lang="zh-TW" altLang="en-US"/>
           </a:p>
@@ -3160,904 +3126,7 @@
     </p:spTree>
     <p:extLst>
       <p:ext uri="{BB962C8B-B14F-4D97-AF65-F5344CB8AC3E}">
-        <p14:creationId xmlns="" xmlns:p14="http://schemas.microsoft.com/office/powerpoint/2010/main" val="2765166867"/>
-      </p:ext>
-    </p:extLst>
-  </p:cSld>
-  <p:clrMapOvr>
-    <a:masterClrMapping/>
-  </p:clrMapOvr>
-</p:sld>
-</file>
-
-<file path=ppt/slides/slide10.xml><?xml version="1.0" encoding="utf-8"?>
-<p:sld xmlns:a="http://schemas.openxmlformats.org/drawingml/2006/main" xmlns:r="http://schemas.openxmlformats.org/officeDocument/2006/relationships" xmlns:p="http://schemas.openxmlformats.org/presentationml/2006/main">
-  <p:cSld>
-    <p:spTree>
-      <p:nvGrpSpPr>
-        <p:cNvPr id="1" name=""/>
-        <p:cNvGrpSpPr/>
-        <p:nvPr/>
-      </p:nvGrpSpPr>
-      <p:grpSpPr>
-        <a:xfrm>
-          <a:off x="0" y="0"/>
-          <a:ext cx="0" cy="0"/>
-          <a:chOff x="0" y="0"/>
-          <a:chExt cx="0" cy="0"/>
-        </a:xfrm>
-      </p:grpSpPr>
-      <p:sp>
-        <p:nvSpPr>
-          <p:cNvPr id="5" name="內容版面配置區 4"/>
-          <p:cNvSpPr>
-            <a:spLocks noGrp="1"/>
-          </p:cNvSpPr>
-          <p:nvPr>
-            <p:ph idx="1"/>
-          </p:nvPr>
-        </p:nvSpPr>
-        <p:spPr>
-          <a:xfrm>
-            <a:off x="0" y="2084853"/>
-            <a:ext cx="12192000" cy="2404863"/>
-          </a:xfrm>
-        </p:spPr>
-        <p:txBody>
-          <a:bodyPr anchor="ctr">
-            <a:normAutofit/>
-          </a:bodyPr>
-          <a:lstStyle/>
-          <a:p>
-            <a:pPr algn="ctr">
-              <a:buNone/>
-            </a:pPr>
-            <a:r>
-              <a:rPr lang="zh-TW" altLang="en-US" sz="6400" b="1" dirty="0">
-                <a:solidFill>
-                  <a:srgbClr val="660033"/>
-                </a:solidFill>
-                <a:latin typeface="微軟正黑體" pitchFamily="34" charset="-120"/>
-                <a:ea typeface="微軟正黑體" pitchFamily="34" charset="-120"/>
-              </a:rPr>
-              <a:t>唯有耶穌掌管天地萬有</a:t>
-            </a:r>
-            <a:endParaRPr lang="en-US" altLang="zh-TW" sz="6400" b="1" dirty="0">
-              <a:solidFill>
-                <a:srgbClr val="660033"/>
-              </a:solidFill>
-              <a:latin typeface="微軟正黑體" pitchFamily="34" charset="-120"/>
-              <a:ea typeface="微軟正黑體" pitchFamily="34" charset="-120"/>
-            </a:endParaRPr>
-          </a:p>
-          <a:p>
-            <a:pPr algn="ctr">
-              <a:buNone/>
-            </a:pPr>
-            <a:r>
-              <a:rPr lang="zh-TW" altLang="en-US" sz="6400" b="1" dirty="0">
-                <a:solidFill>
-                  <a:srgbClr val="660033"/>
-                </a:solidFill>
-                <a:latin typeface="微軟正黑體" pitchFamily="34" charset="-120"/>
-                <a:ea typeface="微軟正黑體" pitchFamily="34" charset="-120"/>
-              </a:rPr>
-              <a:t>唯有耶穌能使水變成酒</a:t>
-            </a:r>
-            <a:endParaRPr lang="en-US" altLang="zh-TW" sz="6400" b="1" dirty="0">
-              <a:solidFill>
-                <a:srgbClr val="660033"/>
-              </a:solidFill>
-              <a:latin typeface="微軟正黑體" pitchFamily="34" charset="-120"/>
-              <a:ea typeface="微軟正黑體" pitchFamily="34" charset="-120"/>
-            </a:endParaRPr>
-          </a:p>
-        </p:txBody>
-      </p:sp>
-    </p:spTree>
-    <p:extLst>
-      <p:ext uri="{BB962C8B-B14F-4D97-AF65-F5344CB8AC3E}">
-        <p14:creationId xmlns="" xmlns:p14="http://schemas.microsoft.com/office/powerpoint/2010/main" val="2081422581"/>
-      </p:ext>
-    </p:extLst>
-  </p:cSld>
-  <p:clrMapOvr>
-    <a:masterClrMapping/>
-  </p:clrMapOvr>
-</p:sld>
-</file>
-
-<file path=ppt/slides/slide11.xml><?xml version="1.0" encoding="utf-8"?>
-<p:sld xmlns:a="http://schemas.openxmlformats.org/drawingml/2006/main" xmlns:r="http://schemas.openxmlformats.org/officeDocument/2006/relationships" xmlns:p="http://schemas.openxmlformats.org/presentationml/2006/main">
-  <p:cSld>
-    <p:spTree>
-      <p:nvGrpSpPr>
-        <p:cNvPr id="1" name=""/>
-        <p:cNvGrpSpPr/>
-        <p:nvPr/>
-      </p:nvGrpSpPr>
-      <p:grpSpPr>
-        <a:xfrm>
-          <a:off x="0" y="0"/>
-          <a:ext cx="0" cy="0"/>
-          <a:chOff x="0" y="0"/>
-          <a:chExt cx="0" cy="0"/>
-        </a:xfrm>
-      </p:grpSpPr>
-      <p:sp>
-        <p:nvSpPr>
-          <p:cNvPr id="5" name="內容版面配置區 4"/>
-          <p:cNvSpPr>
-            <a:spLocks noGrp="1"/>
-          </p:cNvSpPr>
-          <p:nvPr>
-            <p:ph idx="1"/>
-          </p:nvPr>
-        </p:nvSpPr>
-        <p:spPr>
-          <a:xfrm>
-            <a:off x="0" y="2084853"/>
-            <a:ext cx="12192000" cy="2404863"/>
-          </a:xfrm>
-        </p:spPr>
-        <p:txBody>
-          <a:bodyPr anchor="ctr">
-            <a:normAutofit/>
-          </a:bodyPr>
-          <a:lstStyle/>
-          <a:p>
-            <a:pPr algn="ctr">
-              <a:buNone/>
-            </a:pPr>
-            <a:r>
-              <a:rPr lang="zh-TW" altLang="en-US" sz="6400" b="1" dirty="0">
-                <a:solidFill>
-                  <a:srgbClr val="660033"/>
-                </a:solidFill>
-                <a:latin typeface="微軟正黑體" pitchFamily="34" charset="-120"/>
-                <a:ea typeface="微軟正黑體" pitchFamily="34" charset="-120"/>
-              </a:rPr>
-              <a:t>叫狂風巨浪平息</a:t>
-            </a:r>
-            <a:endParaRPr lang="en-US" altLang="zh-TW" sz="6400" b="1" dirty="0">
-              <a:solidFill>
-                <a:srgbClr val="660033"/>
-              </a:solidFill>
-              <a:latin typeface="微軟正黑體" pitchFamily="34" charset="-120"/>
-              <a:ea typeface="微軟正黑體" pitchFamily="34" charset="-120"/>
-            </a:endParaRPr>
-          </a:p>
-          <a:p>
-            <a:pPr algn="ctr">
-              <a:buNone/>
-            </a:pPr>
-            <a:r>
-              <a:rPr lang="zh-TW" altLang="en-US" sz="6400" b="1" dirty="0">
-                <a:solidFill>
-                  <a:srgbClr val="660033"/>
-                </a:solidFill>
-                <a:latin typeface="微軟正黑體" pitchFamily="34" charset="-120"/>
-                <a:ea typeface="微軟正黑體" pitchFamily="34" charset="-120"/>
-              </a:rPr>
-              <a:t>大能赦罪行神蹟</a:t>
-            </a:r>
-            <a:endParaRPr lang="en-US" altLang="zh-TW" sz="6400" b="1" dirty="0">
-              <a:solidFill>
-                <a:srgbClr val="660033"/>
-              </a:solidFill>
-              <a:latin typeface="微軟正黑體" pitchFamily="34" charset="-120"/>
-              <a:ea typeface="微軟正黑體" pitchFamily="34" charset="-120"/>
-            </a:endParaRPr>
-          </a:p>
-        </p:txBody>
-      </p:sp>
-    </p:spTree>
-    <p:extLst>
-      <p:ext uri="{BB962C8B-B14F-4D97-AF65-F5344CB8AC3E}">
-        <p14:creationId xmlns="" xmlns:p14="http://schemas.microsoft.com/office/powerpoint/2010/main" val="4152005013"/>
-      </p:ext>
-    </p:extLst>
-  </p:cSld>
-  <p:clrMapOvr>
-    <a:masterClrMapping/>
-  </p:clrMapOvr>
-</p:sld>
-</file>
-
-<file path=ppt/slides/slide12.xml><?xml version="1.0" encoding="utf-8"?>
-<p:sld xmlns:a="http://schemas.openxmlformats.org/drawingml/2006/main" xmlns:r="http://schemas.openxmlformats.org/officeDocument/2006/relationships" xmlns:p="http://schemas.openxmlformats.org/presentationml/2006/main">
-  <p:cSld>
-    <p:spTree>
-      <p:nvGrpSpPr>
-        <p:cNvPr id="1" name=""/>
-        <p:cNvGrpSpPr/>
-        <p:nvPr/>
-      </p:nvGrpSpPr>
-      <p:grpSpPr>
-        <a:xfrm>
-          <a:off x="0" y="0"/>
-          <a:ext cx="0" cy="0"/>
-          <a:chOff x="0" y="0"/>
-          <a:chExt cx="0" cy="0"/>
-        </a:xfrm>
-      </p:grpSpPr>
-      <p:sp>
-        <p:nvSpPr>
-          <p:cNvPr id="5" name="內容版面配置區 4"/>
-          <p:cNvSpPr>
-            <a:spLocks noGrp="1"/>
-          </p:cNvSpPr>
-          <p:nvPr>
-            <p:ph idx="1"/>
-          </p:nvPr>
-        </p:nvSpPr>
-        <p:spPr>
-          <a:xfrm>
-            <a:off x="0" y="2084853"/>
-            <a:ext cx="12192000" cy="2404863"/>
-          </a:xfrm>
-        </p:spPr>
-        <p:txBody>
-          <a:bodyPr anchor="ctr">
-            <a:normAutofit/>
-          </a:bodyPr>
-          <a:lstStyle/>
-          <a:p>
-            <a:pPr algn="ctr">
-              <a:buNone/>
-            </a:pPr>
-            <a:r>
-              <a:rPr lang="zh-TW" altLang="en-US" sz="6400" b="1" dirty="0">
-                <a:solidFill>
-                  <a:srgbClr val="660033"/>
-                </a:solidFill>
-                <a:latin typeface="微軟正黑體" pitchFamily="34" charset="-120"/>
-                <a:ea typeface="微軟正黑體" pitchFamily="34" charset="-120"/>
-              </a:rPr>
-              <a:t>耶穌無人</a:t>
-            </a:r>
-            <a:r>
-              <a:rPr lang="zh-TW" altLang="en-US" sz="6400" b="1" dirty="0" smtClean="0">
-                <a:solidFill>
-                  <a:srgbClr val="660033"/>
-                </a:solidFill>
-                <a:latin typeface="微軟正黑體" pitchFamily="34" charset="-120"/>
-                <a:ea typeface="微軟正黑體" pitchFamily="34" charset="-120"/>
-              </a:rPr>
-              <a:t>與</a:t>
-            </a:r>
-            <a:r>
-              <a:rPr lang="zh-CN" altLang="en-US" sz="6400" b="1" dirty="0" smtClean="0">
-                <a:solidFill>
-                  <a:srgbClr val="660033"/>
-                </a:solidFill>
-                <a:latin typeface="微軟正黑體" pitchFamily="34" charset="-120"/>
-                <a:ea typeface="微軟正黑體" pitchFamily="34" charset="-120"/>
-              </a:rPr>
-              <a:t>祢</a:t>
-            </a:r>
-            <a:r>
-              <a:rPr lang="zh-TW" altLang="en-US" sz="6400" b="1" dirty="0" smtClean="0">
-                <a:solidFill>
-                  <a:srgbClr val="660033"/>
-                </a:solidFill>
-                <a:latin typeface="微軟正黑體" pitchFamily="34" charset="-120"/>
-                <a:ea typeface="微軟正黑體" pitchFamily="34" charset="-120"/>
-              </a:rPr>
-              <a:t>相比</a:t>
-            </a:r>
-            <a:endParaRPr lang="zh-TW" altLang="en-US" sz="6400" b="1" dirty="0">
-              <a:solidFill>
-                <a:srgbClr val="660033"/>
-              </a:solidFill>
-              <a:latin typeface="微軟正黑體" pitchFamily="34" charset="-120"/>
-              <a:ea typeface="微軟正黑體" pitchFamily="34" charset="-120"/>
-            </a:endParaRPr>
-          </a:p>
-        </p:txBody>
-      </p:sp>
-    </p:spTree>
-    <p:extLst>
-      <p:ext uri="{BB962C8B-B14F-4D97-AF65-F5344CB8AC3E}">
-        <p14:creationId xmlns="" xmlns:p14="http://schemas.microsoft.com/office/powerpoint/2010/main" val="714244842"/>
-      </p:ext>
-    </p:extLst>
-  </p:cSld>
-  <p:clrMapOvr>
-    <a:masterClrMapping/>
-  </p:clrMapOvr>
-</p:sld>
-</file>
-
-<file path=ppt/slides/slide13.xml><?xml version="1.0" encoding="utf-8"?>
-<p:sld xmlns:a="http://schemas.openxmlformats.org/drawingml/2006/main" xmlns:r="http://schemas.openxmlformats.org/officeDocument/2006/relationships" xmlns:p="http://schemas.openxmlformats.org/presentationml/2006/main">
-  <p:cSld>
-    <p:spTree>
-      <p:nvGrpSpPr>
-        <p:cNvPr id="1" name=""/>
-        <p:cNvGrpSpPr/>
-        <p:nvPr/>
-      </p:nvGrpSpPr>
-      <p:grpSpPr>
-        <a:xfrm>
-          <a:off x="0" y="0"/>
-          <a:ext cx="0" cy="0"/>
-          <a:chOff x="0" y="0"/>
-          <a:chExt cx="0" cy="0"/>
-        </a:xfrm>
-      </p:grpSpPr>
-      <p:sp>
-        <p:nvSpPr>
-          <p:cNvPr id="5" name="內容版面配置區 4"/>
-          <p:cNvSpPr>
-            <a:spLocks noGrp="1"/>
-          </p:cNvSpPr>
-          <p:nvPr>
-            <p:ph idx="1"/>
-          </p:nvPr>
-        </p:nvSpPr>
-        <p:spPr>
-          <a:xfrm>
-            <a:off x="0" y="2084853"/>
-            <a:ext cx="12192000" cy="2404863"/>
-          </a:xfrm>
-        </p:spPr>
-        <p:txBody>
-          <a:bodyPr anchor="ctr">
-            <a:normAutofit/>
-          </a:bodyPr>
-          <a:lstStyle/>
-          <a:p>
-            <a:pPr algn="ctr">
-              <a:buNone/>
-            </a:pPr>
-            <a:r>
-              <a:rPr lang="zh-TW" altLang="en-US" sz="6400" b="1" dirty="0">
-                <a:solidFill>
-                  <a:srgbClr val="660033"/>
-                </a:solidFill>
-                <a:latin typeface="微軟正黑體" pitchFamily="34" charset="-120"/>
-                <a:ea typeface="微軟正黑體" pitchFamily="34" charset="-120"/>
-              </a:rPr>
-              <a:t>唯有耶穌掌管天地萬有</a:t>
-            </a:r>
-            <a:endParaRPr lang="en-US" altLang="zh-TW" sz="6400" b="1" dirty="0">
-              <a:solidFill>
-                <a:srgbClr val="660033"/>
-              </a:solidFill>
-              <a:latin typeface="微軟正黑體" pitchFamily="34" charset="-120"/>
-              <a:ea typeface="微軟正黑體" pitchFamily="34" charset="-120"/>
-            </a:endParaRPr>
-          </a:p>
-          <a:p>
-            <a:pPr algn="ctr">
-              <a:buNone/>
-            </a:pPr>
-            <a:r>
-              <a:rPr lang="zh-TW" altLang="en-US" sz="6400" b="1" dirty="0">
-                <a:solidFill>
-                  <a:srgbClr val="660033"/>
-                </a:solidFill>
-                <a:latin typeface="微軟正黑體" pitchFamily="34" charset="-120"/>
-                <a:ea typeface="微軟正黑體" pitchFamily="34" charset="-120"/>
-              </a:rPr>
-              <a:t>唯有耶穌能使水變成酒</a:t>
-            </a:r>
-            <a:endParaRPr lang="en-US" altLang="zh-TW" sz="6400" b="1" dirty="0">
-              <a:solidFill>
-                <a:srgbClr val="660033"/>
-              </a:solidFill>
-              <a:latin typeface="微軟正黑體" pitchFamily="34" charset="-120"/>
-              <a:ea typeface="微軟正黑體" pitchFamily="34" charset="-120"/>
-            </a:endParaRPr>
-          </a:p>
-        </p:txBody>
-      </p:sp>
-    </p:spTree>
-    <p:extLst>
-      <p:ext uri="{BB962C8B-B14F-4D97-AF65-F5344CB8AC3E}">
-        <p14:creationId xmlns="" xmlns:p14="http://schemas.microsoft.com/office/powerpoint/2010/main" val="2081422581"/>
-      </p:ext>
-    </p:extLst>
-  </p:cSld>
-  <p:clrMapOvr>
-    <a:masterClrMapping/>
-  </p:clrMapOvr>
-</p:sld>
-</file>
-
-<file path=ppt/slides/slide14.xml><?xml version="1.0" encoding="utf-8"?>
-<p:sld xmlns:a="http://schemas.openxmlformats.org/drawingml/2006/main" xmlns:r="http://schemas.openxmlformats.org/officeDocument/2006/relationships" xmlns:p="http://schemas.openxmlformats.org/presentationml/2006/main">
-  <p:cSld>
-    <p:spTree>
-      <p:nvGrpSpPr>
-        <p:cNvPr id="1" name=""/>
-        <p:cNvGrpSpPr/>
-        <p:nvPr/>
-      </p:nvGrpSpPr>
-      <p:grpSpPr>
-        <a:xfrm>
-          <a:off x="0" y="0"/>
-          <a:ext cx="0" cy="0"/>
-          <a:chOff x="0" y="0"/>
-          <a:chExt cx="0" cy="0"/>
-        </a:xfrm>
-      </p:grpSpPr>
-      <p:sp>
-        <p:nvSpPr>
-          <p:cNvPr id="5" name="內容版面配置區 4"/>
-          <p:cNvSpPr>
-            <a:spLocks noGrp="1"/>
-          </p:cNvSpPr>
-          <p:nvPr>
-            <p:ph idx="1"/>
-          </p:nvPr>
-        </p:nvSpPr>
-        <p:spPr>
-          <a:xfrm>
-            <a:off x="0" y="2084853"/>
-            <a:ext cx="12192000" cy="2404863"/>
-          </a:xfrm>
-        </p:spPr>
-        <p:txBody>
-          <a:bodyPr anchor="ctr">
-            <a:normAutofit/>
-          </a:bodyPr>
-          <a:lstStyle/>
-          <a:p>
-            <a:pPr algn="ctr">
-              <a:buNone/>
-            </a:pPr>
-            <a:r>
-              <a:rPr lang="zh-TW" altLang="en-US" sz="6400" b="1" dirty="0">
-                <a:solidFill>
-                  <a:srgbClr val="660033"/>
-                </a:solidFill>
-                <a:latin typeface="微軟正黑體" pitchFamily="34" charset="-120"/>
-                <a:ea typeface="微軟正黑體" pitchFamily="34" charset="-120"/>
-              </a:rPr>
-              <a:t>叫狂風巨浪平息</a:t>
-            </a:r>
-            <a:endParaRPr lang="en-US" altLang="zh-TW" sz="6400" b="1" dirty="0">
-              <a:solidFill>
-                <a:srgbClr val="660033"/>
-              </a:solidFill>
-              <a:latin typeface="微軟正黑體" pitchFamily="34" charset="-120"/>
-              <a:ea typeface="微軟正黑體" pitchFamily="34" charset="-120"/>
-            </a:endParaRPr>
-          </a:p>
-          <a:p>
-            <a:pPr algn="ctr">
-              <a:buNone/>
-            </a:pPr>
-            <a:r>
-              <a:rPr lang="zh-TW" altLang="en-US" sz="6400" b="1" dirty="0">
-                <a:solidFill>
-                  <a:srgbClr val="660033"/>
-                </a:solidFill>
-                <a:latin typeface="微軟正黑體" pitchFamily="34" charset="-120"/>
-                <a:ea typeface="微軟正黑體" pitchFamily="34" charset="-120"/>
-              </a:rPr>
-              <a:t>大能赦罪行神蹟</a:t>
-            </a:r>
-            <a:endParaRPr lang="en-US" altLang="zh-TW" sz="6400" b="1" dirty="0">
-              <a:solidFill>
-                <a:srgbClr val="660033"/>
-              </a:solidFill>
-              <a:latin typeface="微軟正黑體" pitchFamily="34" charset="-120"/>
-              <a:ea typeface="微軟正黑體" pitchFamily="34" charset="-120"/>
-            </a:endParaRPr>
-          </a:p>
-        </p:txBody>
-      </p:sp>
-    </p:spTree>
-    <p:extLst>
-      <p:ext uri="{BB962C8B-B14F-4D97-AF65-F5344CB8AC3E}">
-        <p14:creationId xmlns="" xmlns:p14="http://schemas.microsoft.com/office/powerpoint/2010/main" val="4152005013"/>
-      </p:ext>
-    </p:extLst>
-  </p:cSld>
-  <p:clrMapOvr>
-    <a:masterClrMapping/>
-  </p:clrMapOvr>
-</p:sld>
-</file>
-
-<file path=ppt/slides/slide15.xml><?xml version="1.0" encoding="utf-8"?>
-<p:sld xmlns:a="http://schemas.openxmlformats.org/drawingml/2006/main" xmlns:r="http://schemas.openxmlformats.org/officeDocument/2006/relationships" xmlns:p="http://schemas.openxmlformats.org/presentationml/2006/main">
-  <p:cSld>
-    <p:spTree>
-      <p:nvGrpSpPr>
-        <p:cNvPr id="1" name=""/>
-        <p:cNvGrpSpPr/>
-        <p:nvPr/>
-      </p:nvGrpSpPr>
-      <p:grpSpPr>
-        <a:xfrm>
-          <a:off x="0" y="0"/>
-          <a:ext cx="0" cy="0"/>
-          <a:chOff x="0" y="0"/>
-          <a:chExt cx="0" cy="0"/>
-        </a:xfrm>
-      </p:grpSpPr>
-      <p:sp>
-        <p:nvSpPr>
-          <p:cNvPr id="5" name="內容版面配置區 4"/>
-          <p:cNvSpPr>
-            <a:spLocks noGrp="1"/>
-          </p:cNvSpPr>
-          <p:nvPr>
-            <p:ph idx="1"/>
-          </p:nvPr>
-        </p:nvSpPr>
-        <p:spPr>
-          <a:xfrm>
-            <a:off x="0" y="2084853"/>
-            <a:ext cx="12192000" cy="2404863"/>
-          </a:xfrm>
-        </p:spPr>
-        <p:txBody>
-          <a:bodyPr anchor="ctr">
-            <a:normAutofit/>
-          </a:bodyPr>
-          <a:lstStyle/>
-          <a:p>
-            <a:pPr algn="ctr">
-              <a:buNone/>
-            </a:pPr>
-            <a:r>
-              <a:rPr lang="zh-TW" altLang="en-US" sz="6400" b="1" dirty="0">
-                <a:solidFill>
-                  <a:srgbClr val="660033"/>
-                </a:solidFill>
-                <a:latin typeface="微軟正黑體" pitchFamily="34" charset="-120"/>
-                <a:ea typeface="微軟正黑體" pitchFamily="34" charset="-120"/>
-              </a:rPr>
-              <a:t>耶穌無人</a:t>
-            </a:r>
-            <a:r>
-              <a:rPr lang="zh-TW" altLang="en-US" sz="6400" b="1" dirty="0" smtClean="0">
-                <a:solidFill>
-                  <a:srgbClr val="660033"/>
-                </a:solidFill>
-                <a:latin typeface="微軟正黑體" pitchFamily="34" charset="-120"/>
-                <a:ea typeface="微軟正黑體" pitchFamily="34" charset="-120"/>
-              </a:rPr>
-              <a:t>與</a:t>
-            </a:r>
-            <a:r>
-              <a:rPr lang="zh-CN" altLang="en-US" sz="6400" b="1" dirty="0" smtClean="0">
-                <a:solidFill>
-                  <a:srgbClr val="660033"/>
-                </a:solidFill>
-                <a:latin typeface="微軟正黑體" pitchFamily="34" charset="-120"/>
-                <a:ea typeface="微軟正黑體" pitchFamily="34" charset="-120"/>
-              </a:rPr>
-              <a:t>祢</a:t>
-            </a:r>
-            <a:r>
-              <a:rPr lang="zh-TW" altLang="en-US" sz="6400" b="1" dirty="0" smtClean="0">
-                <a:solidFill>
-                  <a:srgbClr val="660033"/>
-                </a:solidFill>
-                <a:latin typeface="微軟正黑體" pitchFamily="34" charset="-120"/>
-                <a:ea typeface="微軟正黑體" pitchFamily="34" charset="-120"/>
-              </a:rPr>
-              <a:t>相比</a:t>
-            </a:r>
-            <a:endParaRPr lang="zh-TW" altLang="en-US" sz="6400" b="1" dirty="0">
-              <a:solidFill>
-                <a:srgbClr val="660033"/>
-              </a:solidFill>
-              <a:latin typeface="微軟正黑體" pitchFamily="34" charset="-120"/>
-              <a:ea typeface="微軟正黑體" pitchFamily="34" charset="-120"/>
-            </a:endParaRPr>
-          </a:p>
-        </p:txBody>
-      </p:sp>
-    </p:spTree>
-    <p:extLst>
-      <p:ext uri="{BB962C8B-B14F-4D97-AF65-F5344CB8AC3E}">
-        <p14:creationId xmlns="" xmlns:p14="http://schemas.microsoft.com/office/powerpoint/2010/main" val="714244842"/>
-      </p:ext>
-    </p:extLst>
-  </p:cSld>
-  <p:clrMapOvr>
-    <a:masterClrMapping/>
-  </p:clrMapOvr>
-</p:sld>
-</file>
-
-<file path=ppt/slides/slide16.xml><?xml version="1.0" encoding="utf-8"?>
-<p:sld xmlns:a="http://schemas.openxmlformats.org/drawingml/2006/main" xmlns:r="http://schemas.openxmlformats.org/officeDocument/2006/relationships" xmlns:p="http://schemas.openxmlformats.org/presentationml/2006/main">
-  <p:cSld>
-    <p:spTree>
-      <p:nvGrpSpPr>
-        <p:cNvPr id="1" name=""/>
-        <p:cNvGrpSpPr/>
-        <p:nvPr/>
-      </p:nvGrpSpPr>
-      <p:grpSpPr>
-        <a:xfrm>
-          <a:off x="0" y="0"/>
-          <a:ext cx="0" cy="0"/>
-          <a:chOff x="0" y="0"/>
-          <a:chExt cx="0" cy="0"/>
-        </a:xfrm>
-      </p:grpSpPr>
-      <p:sp>
-        <p:nvSpPr>
-          <p:cNvPr id="5" name="內容版面配置區 4"/>
-          <p:cNvSpPr>
-            <a:spLocks noGrp="1"/>
-          </p:cNvSpPr>
-          <p:nvPr>
-            <p:ph idx="1"/>
-          </p:nvPr>
-        </p:nvSpPr>
-        <p:spPr>
-          <a:xfrm>
-            <a:off x="0" y="2084853"/>
-            <a:ext cx="12192000" cy="2404863"/>
-          </a:xfrm>
-        </p:spPr>
-        <p:txBody>
-          <a:bodyPr anchor="ctr">
-            <a:normAutofit/>
-          </a:bodyPr>
-          <a:lstStyle/>
-          <a:p>
-            <a:pPr algn="ctr">
-              <a:buNone/>
-            </a:pPr>
-            <a:r>
-              <a:rPr lang="zh-TW" altLang="en-US" sz="6400" b="1" dirty="0">
-                <a:solidFill>
-                  <a:srgbClr val="660033"/>
-                </a:solidFill>
-                <a:latin typeface="微軟正黑體" pitchFamily="34" charset="-120"/>
-                <a:ea typeface="微軟正黑體" pitchFamily="34" charset="-120"/>
-              </a:rPr>
-              <a:t>唯有耶穌掌管天地萬有</a:t>
-            </a:r>
-            <a:endParaRPr lang="en-US" altLang="zh-TW" sz="6400" b="1" dirty="0">
-              <a:solidFill>
-                <a:srgbClr val="660033"/>
-              </a:solidFill>
-              <a:latin typeface="微軟正黑體" pitchFamily="34" charset="-120"/>
-              <a:ea typeface="微軟正黑體" pitchFamily="34" charset="-120"/>
-            </a:endParaRPr>
-          </a:p>
-          <a:p>
-            <a:pPr algn="ctr">
-              <a:buNone/>
-            </a:pPr>
-            <a:r>
-              <a:rPr lang="zh-TW" altLang="en-US" sz="6400" b="1" dirty="0">
-                <a:solidFill>
-                  <a:srgbClr val="660033"/>
-                </a:solidFill>
-                <a:latin typeface="微軟正黑體" pitchFamily="34" charset="-120"/>
-                <a:ea typeface="微軟正黑體" pitchFamily="34" charset="-120"/>
-              </a:rPr>
-              <a:t>唯有耶穌能使水變成酒</a:t>
-            </a:r>
-            <a:endParaRPr lang="en-US" altLang="zh-TW" sz="6400" b="1" dirty="0">
-              <a:solidFill>
-                <a:srgbClr val="660033"/>
-              </a:solidFill>
-              <a:latin typeface="微軟正黑體" pitchFamily="34" charset="-120"/>
-              <a:ea typeface="微軟正黑體" pitchFamily="34" charset="-120"/>
-            </a:endParaRPr>
-          </a:p>
-        </p:txBody>
-      </p:sp>
-    </p:spTree>
-    <p:extLst>
-      <p:ext uri="{BB962C8B-B14F-4D97-AF65-F5344CB8AC3E}">
-        <p14:creationId xmlns="" xmlns:p14="http://schemas.microsoft.com/office/powerpoint/2010/main" val="2081422581"/>
-      </p:ext>
-    </p:extLst>
-  </p:cSld>
-  <p:clrMapOvr>
-    <a:masterClrMapping/>
-  </p:clrMapOvr>
-</p:sld>
-</file>
-
-<file path=ppt/slides/slide17.xml><?xml version="1.0" encoding="utf-8"?>
-<p:sld xmlns:a="http://schemas.openxmlformats.org/drawingml/2006/main" xmlns:r="http://schemas.openxmlformats.org/officeDocument/2006/relationships" xmlns:p="http://schemas.openxmlformats.org/presentationml/2006/main">
-  <p:cSld>
-    <p:spTree>
-      <p:nvGrpSpPr>
-        <p:cNvPr id="1" name=""/>
-        <p:cNvGrpSpPr/>
-        <p:nvPr/>
-      </p:nvGrpSpPr>
-      <p:grpSpPr>
-        <a:xfrm>
-          <a:off x="0" y="0"/>
-          <a:ext cx="0" cy="0"/>
-          <a:chOff x="0" y="0"/>
-          <a:chExt cx="0" cy="0"/>
-        </a:xfrm>
-      </p:grpSpPr>
-      <p:sp>
-        <p:nvSpPr>
-          <p:cNvPr id="5" name="內容版面配置區 4"/>
-          <p:cNvSpPr>
-            <a:spLocks noGrp="1"/>
-          </p:cNvSpPr>
-          <p:nvPr>
-            <p:ph idx="1"/>
-          </p:nvPr>
-        </p:nvSpPr>
-        <p:spPr>
-          <a:xfrm>
-            <a:off x="0" y="2084853"/>
-            <a:ext cx="12192000" cy="2404863"/>
-          </a:xfrm>
-        </p:spPr>
-        <p:txBody>
-          <a:bodyPr anchor="ctr">
-            <a:normAutofit/>
-          </a:bodyPr>
-          <a:lstStyle/>
-          <a:p>
-            <a:pPr algn="ctr">
-              <a:buNone/>
-            </a:pPr>
-            <a:r>
-              <a:rPr lang="zh-TW" altLang="en-US" sz="6400" b="1" dirty="0">
-                <a:solidFill>
-                  <a:srgbClr val="660033"/>
-                </a:solidFill>
-                <a:latin typeface="微軟正黑體" pitchFamily="34" charset="-120"/>
-                <a:ea typeface="微軟正黑體" pitchFamily="34" charset="-120"/>
-              </a:rPr>
-              <a:t>叫狂風巨浪平息</a:t>
-            </a:r>
-            <a:endParaRPr lang="en-US" altLang="zh-TW" sz="6400" b="1" dirty="0">
-              <a:solidFill>
-                <a:srgbClr val="660033"/>
-              </a:solidFill>
-              <a:latin typeface="微軟正黑體" pitchFamily="34" charset="-120"/>
-              <a:ea typeface="微軟正黑體" pitchFamily="34" charset="-120"/>
-            </a:endParaRPr>
-          </a:p>
-          <a:p>
-            <a:pPr algn="ctr">
-              <a:buNone/>
-            </a:pPr>
-            <a:r>
-              <a:rPr lang="zh-TW" altLang="en-US" sz="6400" b="1" dirty="0">
-                <a:solidFill>
-                  <a:srgbClr val="660033"/>
-                </a:solidFill>
-                <a:latin typeface="微軟正黑體" pitchFamily="34" charset="-120"/>
-                <a:ea typeface="微軟正黑體" pitchFamily="34" charset="-120"/>
-              </a:rPr>
-              <a:t>大能赦罪行神蹟</a:t>
-            </a:r>
-            <a:endParaRPr lang="en-US" altLang="zh-TW" sz="6400" b="1" dirty="0">
-              <a:solidFill>
-                <a:srgbClr val="660033"/>
-              </a:solidFill>
-              <a:latin typeface="微軟正黑體" pitchFamily="34" charset="-120"/>
-              <a:ea typeface="微軟正黑體" pitchFamily="34" charset="-120"/>
-            </a:endParaRPr>
-          </a:p>
-        </p:txBody>
-      </p:sp>
-    </p:spTree>
-    <p:extLst>
-      <p:ext uri="{BB962C8B-B14F-4D97-AF65-F5344CB8AC3E}">
-        <p14:creationId xmlns="" xmlns:p14="http://schemas.microsoft.com/office/powerpoint/2010/main" val="4152005013"/>
-      </p:ext>
-    </p:extLst>
-  </p:cSld>
-  <p:clrMapOvr>
-    <a:masterClrMapping/>
-  </p:clrMapOvr>
-</p:sld>
-</file>
-
-<file path=ppt/slides/slide18.xml><?xml version="1.0" encoding="utf-8"?>
-<p:sld xmlns:a="http://schemas.openxmlformats.org/drawingml/2006/main" xmlns:r="http://schemas.openxmlformats.org/officeDocument/2006/relationships" xmlns:p="http://schemas.openxmlformats.org/presentationml/2006/main">
-  <p:cSld>
-    <p:spTree>
-      <p:nvGrpSpPr>
-        <p:cNvPr id="1" name=""/>
-        <p:cNvGrpSpPr/>
-        <p:nvPr/>
-      </p:nvGrpSpPr>
-      <p:grpSpPr>
-        <a:xfrm>
-          <a:off x="0" y="0"/>
-          <a:ext cx="0" cy="0"/>
-          <a:chOff x="0" y="0"/>
-          <a:chExt cx="0" cy="0"/>
-        </a:xfrm>
-      </p:grpSpPr>
-      <p:sp>
-        <p:nvSpPr>
-          <p:cNvPr id="5" name="內容版面配置區 4"/>
-          <p:cNvSpPr>
-            <a:spLocks noGrp="1"/>
-          </p:cNvSpPr>
-          <p:nvPr>
-            <p:ph idx="1"/>
-          </p:nvPr>
-        </p:nvSpPr>
-        <p:spPr>
-          <a:xfrm>
-            <a:off x="0" y="2084853"/>
-            <a:ext cx="12192000" cy="2404863"/>
-          </a:xfrm>
-        </p:spPr>
-        <p:txBody>
-          <a:bodyPr anchor="ctr">
-            <a:normAutofit/>
-          </a:bodyPr>
-          <a:lstStyle/>
-          <a:p>
-            <a:pPr algn="ctr">
-              <a:buNone/>
-            </a:pPr>
-            <a:r>
-              <a:rPr lang="zh-TW" altLang="en-US" sz="6400" b="1" dirty="0">
-                <a:solidFill>
-                  <a:srgbClr val="660033"/>
-                </a:solidFill>
-                <a:latin typeface="微軟正黑體" pitchFamily="34" charset="-120"/>
-                <a:ea typeface="微軟正黑體" pitchFamily="34" charset="-120"/>
-              </a:rPr>
-              <a:t>耶穌無人</a:t>
-            </a:r>
-            <a:r>
-              <a:rPr lang="zh-TW" altLang="en-US" sz="6400" b="1" dirty="0" smtClean="0">
-                <a:solidFill>
-                  <a:srgbClr val="660033"/>
-                </a:solidFill>
-                <a:latin typeface="微軟正黑體" pitchFamily="34" charset="-120"/>
-                <a:ea typeface="微軟正黑體" pitchFamily="34" charset="-120"/>
-              </a:rPr>
-              <a:t>與</a:t>
-            </a:r>
-            <a:r>
-              <a:rPr lang="zh-CN" altLang="en-US" sz="6400" b="1" dirty="0" smtClean="0">
-                <a:solidFill>
-                  <a:srgbClr val="660033"/>
-                </a:solidFill>
-                <a:latin typeface="微軟正黑體" pitchFamily="34" charset="-120"/>
-                <a:ea typeface="微軟正黑體" pitchFamily="34" charset="-120"/>
-              </a:rPr>
-              <a:t>祢</a:t>
-            </a:r>
-            <a:r>
-              <a:rPr lang="zh-TW" altLang="en-US" sz="6400" b="1" dirty="0" smtClean="0">
-                <a:solidFill>
-                  <a:srgbClr val="660033"/>
-                </a:solidFill>
-                <a:latin typeface="微軟正黑體" pitchFamily="34" charset="-120"/>
-                <a:ea typeface="微軟正黑體" pitchFamily="34" charset="-120"/>
-              </a:rPr>
-              <a:t>相比</a:t>
-            </a:r>
-            <a:endParaRPr lang="zh-TW" altLang="en-US" sz="6400" b="1" dirty="0">
-              <a:solidFill>
-                <a:srgbClr val="660033"/>
-              </a:solidFill>
-              <a:latin typeface="微軟正黑體" pitchFamily="34" charset="-120"/>
-              <a:ea typeface="微軟正黑體" pitchFamily="34" charset="-120"/>
-            </a:endParaRPr>
-          </a:p>
-        </p:txBody>
-      </p:sp>
-    </p:spTree>
-    <p:extLst>
-      <p:ext uri="{BB962C8B-B14F-4D97-AF65-F5344CB8AC3E}">
-        <p14:creationId xmlns="" xmlns:p14="http://schemas.microsoft.com/office/powerpoint/2010/main" val="714244842"/>
+        <p14:creationId xmlns:p14="http://schemas.microsoft.com/office/powerpoint/2010/main" val="2765166867"/>
       </p:ext>
     </p:extLst>
   </p:cSld>
@@ -4110,7 +3179,7 @@
               <a:buNone/>
             </a:pPr>
             <a:r>
-              <a:rPr lang="zh-TW" altLang="en-US" sz="6400" b="1" dirty="0" smtClean="0">
+              <a:rPr lang="zh-TW" altLang="en-US" sz="6400" b="1" dirty="0">
                 <a:solidFill>
                   <a:srgbClr val="660033"/>
                 </a:solidFill>
@@ -4120,7 +3189,7 @@
               <a:t>耶穌</a:t>
             </a:r>
             <a:r>
-              <a:rPr lang="zh-CN" altLang="en-US" sz="6400" b="1" dirty="0" smtClean="0">
+              <a:rPr lang="zh-CN" altLang="en-US" sz="6400" b="1" dirty="0">
                 <a:solidFill>
                   <a:srgbClr val="660033"/>
                 </a:solidFill>
@@ -4130,24 +3199,14 @@
               <a:t>祢</a:t>
             </a:r>
             <a:r>
-              <a:rPr lang="zh-TW" altLang="en-US" sz="6400" b="1" dirty="0" smtClean="0">
+              <a:rPr lang="zh-TW" altLang="en-US" sz="6400" b="1" dirty="0">
                 <a:solidFill>
                   <a:srgbClr val="660033"/>
                 </a:solidFill>
                 <a:latin typeface="微軟正黑體" pitchFamily="34" charset="-120"/>
                 <a:ea typeface="微軟正黑體" pitchFamily="34" charset="-120"/>
               </a:rPr>
-              <a:t>能</a:t>
-            </a:r>
-            <a:r>
-              <a:rPr lang="zh-TW" altLang="en-US" sz="6400" b="1" dirty="0">
-                <a:solidFill>
-                  <a:srgbClr val="660033"/>
-                </a:solidFill>
-                <a:latin typeface="微軟正黑體" pitchFamily="34" charset="-120"/>
-                <a:ea typeface="微軟正黑體" pitchFamily="34" charset="-120"/>
-              </a:rPr>
-              <a:t>使瞎眼看見</a:t>
+              <a:t>能使瞎眼看見</a:t>
             </a:r>
             <a:endParaRPr lang="en-US" altLang="zh-TW" sz="6400" b="1" dirty="0">
               <a:solidFill>
@@ -4162,7 +3221,7 @@
               <a:buNone/>
             </a:pPr>
             <a:r>
-              <a:rPr lang="zh-TW" altLang="en-US" sz="6400" b="1" dirty="0" smtClean="0">
+              <a:rPr lang="zh-TW" altLang="en-US" sz="6400" b="1" dirty="0">
                 <a:solidFill>
                   <a:srgbClr val="660033"/>
                 </a:solidFill>
@@ -4172,7 +3231,7 @@
               <a:t>耶穌</a:t>
             </a:r>
             <a:r>
-              <a:rPr lang="zh-CN" altLang="en-US" sz="6400" b="1" dirty="0" smtClean="0">
+              <a:rPr lang="zh-CN" altLang="en-US" sz="6400" b="1" dirty="0">
                 <a:solidFill>
                   <a:srgbClr val="660033"/>
                 </a:solidFill>
@@ -4182,24 +3241,14 @@
               <a:t>祢</a:t>
             </a:r>
             <a:r>
-              <a:rPr lang="zh-TW" altLang="en-US" sz="6400" b="1" dirty="0" smtClean="0">
+              <a:rPr lang="zh-TW" altLang="en-US" sz="6400" b="1" dirty="0">
                 <a:solidFill>
                   <a:srgbClr val="660033"/>
                 </a:solidFill>
                 <a:latin typeface="微軟正黑體" pitchFamily="34" charset="-120"/>
                 <a:ea typeface="微軟正黑體" pitchFamily="34" charset="-120"/>
               </a:rPr>
-              <a:t>能</a:t>
-            </a:r>
-            <a:r>
-              <a:rPr lang="zh-TW" altLang="en-US" sz="6400" b="1" dirty="0">
-                <a:solidFill>
-                  <a:srgbClr val="660033"/>
-                </a:solidFill>
-                <a:latin typeface="微軟正黑體" pitchFamily="34" charset="-120"/>
-                <a:ea typeface="微軟正黑體" pitchFamily="34" charset="-120"/>
-              </a:rPr>
-              <a:t>醫治傷心人</a:t>
+              <a:t>能醫治傷心人</a:t>
             </a:r>
             <a:endParaRPr lang="en-US" altLang="zh-TW" sz="6400" b="1" dirty="0">
               <a:solidFill>
@@ -4211,10 +3260,78 @@
           </a:p>
         </p:txBody>
       </p:sp>
+      <p:sp>
+        <p:nvSpPr>
+          <p:cNvPr id="2" name="TextBox 1">
+            <a:extLst>
+              <a:ext uri="{FF2B5EF4-FFF2-40B4-BE49-F238E27FC236}">
+                <a16:creationId xmlns:a16="http://schemas.microsoft.com/office/drawing/2014/main" id="{378725AE-D86F-D33A-D58F-984D35767F04}"/>
+              </a:ext>
+            </a:extLst>
+          </p:cNvPr>
+          <p:cNvSpPr txBox="1"/>
+          <p:nvPr/>
+        </p:nvSpPr>
+        <p:spPr>
+          <a:xfrm>
+            <a:off x="3638" y="5157192"/>
+            <a:ext cx="12192000" cy="646331"/>
+          </a:xfrm>
+          <a:prstGeom prst="rect">
+            <a:avLst/>
+          </a:prstGeom>
+          <a:noFill/>
+        </p:spPr>
+        <p:txBody>
+          <a:bodyPr wrap="square" rtlCol="0">
+            <a:spAutoFit/>
+          </a:bodyPr>
+          <a:lstStyle/>
+          <a:p>
+            <a:pPr algn="ctr"/>
+            <a:r>
+              <a:rPr lang="en-US" sz="3600" b="1" dirty="0">
+                <a:solidFill>
+                  <a:srgbClr val="660033"/>
+                </a:solidFill>
+                <a:latin typeface="Microsoft JhengHei" panose="020B0604030504040204" pitchFamily="34" charset="-120"/>
+                <a:ea typeface="Microsoft JhengHei" panose="020B0604030504040204" pitchFamily="34" charset="-120"/>
+              </a:rPr>
+              <a:t>( </a:t>
+            </a:r>
+            <a:r>
+              <a:rPr lang="zh-CN" altLang="en-US" sz="3600" b="1" dirty="0">
+                <a:solidFill>
+                  <a:srgbClr val="660033"/>
+                </a:solidFill>
+                <a:latin typeface="Microsoft JhengHei" panose="020B0604030504040204" pitchFamily="34" charset="-120"/>
+                <a:ea typeface="Microsoft JhengHei" panose="020B0604030504040204" pitchFamily="34" charset="-120"/>
+              </a:rPr>
+              <a:t>正歌</a:t>
+            </a:r>
+            <a:r>
+              <a:rPr lang="en-US" sz="3600" b="1" dirty="0">
+                <a:solidFill>
+                  <a:srgbClr val="660033"/>
+                </a:solidFill>
+                <a:latin typeface="Microsoft JhengHei" panose="020B0604030504040204" pitchFamily="34" charset="-120"/>
+                <a:ea typeface="Microsoft JhengHei" panose="020B0604030504040204" pitchFamily="34" charset="-120"/>
+              </a:rPr>
+              <a:t> )</a:t>
+            </a:r>
+            <a:endParaRPr lang="vi-VN" sz="3600" b="1" dirty="0">
+              <a:solidFill>
+                <a:srgbClr val="660033"/>
+              </a:solidFill>
+              <a:ea typeface="Microsoft JhengHei" panose="020B0604030504040204" pitchFamily="34" charset="-120"/>
+            </a:endParaRPr>
+          </a:p>
+        </p:txBody>
+      </p:sp>
     </p:spTree>
     <p:extLst>
       <p:ext uri="{BB962C8B-B14F-4D97-AF65-F5344CB8AC3E}">
-        <p14:creationId xmlns="" xmlns:p14="http://schemas.microsoft.com/office/powerpoint/2010/main" val="1873981163"/>
+        <p14:creationId xmlns:p14="http://schemas.microsoft.com/office/powerpoint/2010/main" val="1873981163"/>
       </p:ext>
     </p:extLst>
   </p:cSld>
@@ -4267,7 +3384,7 @@
               <a:buNone/>
             </a:pPr>
             <a:r>
-              <a:rPr lang="zh-TW" altLang="en-US" sz="6400" b="1" dirty="0" smtClean="0">
+              <a:rPr lang="zh-TW" altLang="en-US" sz="6400" b="1" dirty="0">
                 <a:solidFill>
                   <a:srgbClr val="660033"/>
                 </a:solidFill>
@@ -4277,7 +3394,7 @@
               <a:t>耶穌</a:t>
             </a:r>
             <a:r>
-              <a:rPr lang="zh-CN" altLang="en-US" sz="6400" b="1" dirty="0" smtClean="0">
+              <a:rPr lang="zh-CN" altLang="en-US" sz="6400" b="1" dirty="0">
                 <a:solidFill>
                   <a:srgbClr val="660033"/>
                 </a:solidFill>
@@ -4287,24 +3404,14 @@
               <a:t>祢</a:t>
             </a:r>
             <a:r>
-              <a:rPr lang="zh-TW" altLang="en-US" sz="6400" b="1" dirty="0" smtClean="0">
+              <a:rPr lang="zh-TW" altLang="en-US" sz="6400" b="1" dirty="0">
                 <a:solidFill>
                   <a:srgbClr val="660033"/>
                 </a:solidFill>
                 <a:latin typeface="微軟正黑體" pitchFamily="34" charset="-120"/>
                 <a:ea typeface="微軟正黑體" pitchFamily="34" charset="-120"/>
               </a:rPr>
-              <a:t>有</a:t>
-            </a:r>
-            <a:r>
-              <a:rPr lang="zh-TW" altLang="en-US" sz="6400" b="1" dirty="0">
-                <a:solidFill>
-                  <a:srgbClr val="660033"/>
-                </a:solidFill>
-                <a:latin typeface="微軟正黑體" pitchFamily="34" charset="-120"/>
-                <a:ea typeface="微軟正黑體" pitchFamily="34" charset="-120"/>
-              </a:rPr>
-              <a:t>權柄釋放</a:t>
+              <a:t>有權柄釋放</a:t>
             </a:r>
             <a:endParaRPr lang="en-US" altLang="zh-TW" sz="6400" b="1" dirty="0">
               <a:solidFill>
@@ -4331,10 +3438,78 @@
           </a:p>
         </p:txBody>
       </p:sp>
+      <p:sp>
+        <p:nvSpPr>
+          <p:cNvPr id="2" name="TextBox 1">
+            <a:extLst>
+              <a:ext uri="{FF2B5EF4-FFF2-40B4-BE49-F238E27FC236}">
+                <a16:creationId xmlns:a16="http://schemas.microsoft.com/office/drawing/2014/main" id="{9520A454-DA89-BF92-7765-6BB077A8FA48}"/>
+              </a:ext>
+            </a:extLst>
+          </p:cNvPr>
+          <p:cNvSpPr txBox="1"/>
+          <p:nvPr/>
+        </p:nvSpPr>
+        <p:spPr>
+          <a:xfrm>
+            <a:off x="3638" y="5157192"/>
+            <a:ext cx="12192000" cy="646331"/>
+          </a:xfrm>
+          <a:prstGeom prst="rect">
+            <a:avLst/>
+          </a:prstGeom>
+          <a:noFill/>
+        </p:spPr>
+        <p:txBody>
+          <a:bodyPr wrap="square" rtlCol="0">
+            <a:spAutoFit/>
+          </a:bodyPr>
+          <a:lstStyle/>
+          <a:p>
+            <a:pPr algn="ctr"/>
+            <a:r>
+              <a:rPr lang="en-US" sz="3600" b="1" dirty="0">
+                <a:solidFill>
+                  <a:srgbClr val="660033"/>
+                </a:solidFill>
+                <a:latin typeface="Microsoft JhengHei" panose="020B0604030504040204" pitchFamily="34" charset="-120"/>
+                <a:ea typeface="Microsoft JhengHei" panose="020B0604030504040204" pitchFamily="34" charset="-120"/>
+              </a:rPr>
+              <a:t>( </a:t>
+            </a:r>
+            <a:r>
+              <a:rPr lang="zh-CN" altLang="en-US" sz="3600" b="1" dirty="0">
+                <a:solidFill>
+                  <a:srgbClr val="660033"/>
+                </a:solidFill>
+                <a:latin typeface="Microsoft JhengHei" panose="020B0604030504040204" pitchFamily="34" charset="-120"/>
+                <a:ea typeface="Microsoft JhengHei" panose="020B0604030504040204" pitchFamily="34" charset="-120"/>
+              </a:rPr>
+              <a:t>正歌</a:t>
+            </a:r>
+            <a:r>
+              <a:rPr lang="en-US" sz="3600" b="1" dirty="0">
+                <a:solidFill>
+                  <a:srgbClr val="660033"/>
+                </a:solidFill>
+                <a:latin typeface="Microsoft JhengHei" panose="020B0604030504040204" pitchFamily="34" charset="-120"/>
+                <a:ea typeface="Microsoft JhengHei" panose="020B0604030504040204" pitchFamily="34" charset="-120"/>
+              </a:rPr>
+              <a:t> )</a:t>
+            </a:r>
+            <a:endParaRPr lang="vi-VN" sz="3600" b="1" dirty="0">
+              <a:solidFill>
+                <a:srgbClr val="660033"/>
+              </a:solidFill>
+              <a:ea typeface="Microsoft JhengHei" panose="020B0604030504040204" pitchFamily="34" charset="-120"/>
+            </a:endParaRPr>
+          </a:p>
+        </p:txBody>
+      </p:sp>
     </p:spTree>
     <p:extLst>
       <p:ext uri="{BB962C8B-B14F-4D97-AF65-F5344CB8AC3E}">
-        <p14:creationId xmlns="" xmlns:p14="http://schemas.microsoft.com/office/powerpoint/2010/main" val="1283900834"/>
+        <p14:creationId xmlns:p14="http://schemas.microsoft.com/office/powerpoint/2010/main" val="1283900834"/>
       </p:ext>
     </p:extLst>
   </p:cSld>
@@ -4428,10 +3603,78 @@
           </a:p>
         </p:txBody>
       </p:sp>
+      <p:sp>
+        <p:nvSpPr>
+          <p:cNvPr id="2" name="TextBox 1">
+            <a:extLst>
+              <a:ext uri="{FF2B5EF4-FFF2-40B4-BE49-F238E27FC236}">
+                <a16:creationId xmlns:a16="http://schemas.microsoft.com/office/drawing/2014/main" id="{1CE3B3AA-8800-1014-DD39-00C2728CB62A}"/>
+              </a:ext>
+            </a:extLst>
+          </p:cNvPr>
+          <p:cNvSpPr txBox="1"/>
+          <p:nvPr/>
+        </p:nvSpPr>
+        <p:spPr>
+          <a:xfrm>
+            <a:off x="3638" y="5157192"/>
+            <a:ext cx="12192000" cy="646331"/>
+          </a:xfrm>
+          <a:prstGeom prst="rect">
+            <a:avLst/>
+          </a:prstGeom>
+          <a:noFill/>
+        </p:spPr>
+        <p:txBody>
+          <a:bodyPr wrap="square" rtlCol="0">
+            <a:spAutoFit/>
+          </a:bodyPr>
+          <a:lstStyle/>
+          <a:p>
+            <a:pPr algn="ctr"/>
+            <a:r>
+              <a:rPr lang="en-US" sz="3600" b="1" dirty="0">
+                <a:solidFill>
+                  <a:srgbClr val="660033"/>
+                </a:solidFill>
+                <a:latin typeface="Microsoft JhengHei" panose="020B0604030504040204" pitchFamily="34" charset="-120"/>
+                <a:ea typeface="Microsoft JhengHei" panose="020B0604030504040204" pitchFamily="34" charset="-120"/>
+              </a:rPr>
+              <a:t>( </a:t>
+            </a:r>
+            <a:r>
+              <a:rPr lang="zh-CN" altLang="en-US" sz="3600" b="1" dirty="0">
+                <a:solidFill>
+                  <a:srgbClr val="660033"/>
+                </a:solidFill>
+                <a:latin typeface="Microsoft JhengHei" panose="020B0604030504040204" pitchFamily="34" charset="-120"/>
+                <a:ea typeface="Microsoft JhengHei" panose="020B0604030504040204" pitchFamily="34" charset="-120"/>
+              </a:rPr>
+              <a:t>副歌</a:t>
+            </a:r>
+            <a:r>
+              <a:rPr lang="en-US" sz="3600" b="1" dirty="0">
+                <a:solidFill>
+                  <a:srgbClr val="660033"/>
+                </a:solidFill>
+                <a:latin typeface="Microsoft JhengHei" panose="020B0604030504040204" pitchFamily="34" charset="-120"/>
+                <a:ea typeface="Microsoft JhengHei" panose="020B0604030504040204" pitchFamily="34" charset="-120"/>
+              </a:rPr>
+              <a:t> )</a:t>
+            </a:r>
+            <a:endParaRPr lang="vi-VN" sz="3600" b="1" dirty="0">
+              <a:solidFill>
+                <a:srgbClr val="660033"/>
+              </a:solidFill>
+              <a:ea typeface="Microsoft JhengHei" panose="020B0604030504040204" pitchFamily="34" charset="-120"/>
+            </a:endParaRPr>
+          </a:p>
+        </p:txBody>
+      </p:sp>
     </p:spTree>
     <p:extLst>
       <p:ext uri="{BB962C8B-B14F-4D97-AF65-F5344CB8AC3E}">
-        <p14:creationId xmlns="" xmlns:p14="http://schemas.microsoft.com/office/powerpoint/2010/main" val="2081422581"/>
+        <p14:creationId xmlns:p14="http://schemas.microsoft.com/office/powerpoint/2010/main" val="2081422581"/>
       </p:ext>
     </p:extLst>
   </p:cSld>
@@ -4525,10 +3768,78 @@
           </a:p>
         </p:txBody>
       </p:sp>
+      <p:sp>
+        <p:nvSpPr>
+          <p:cNvPr id="2" name="TextBox 1">
+            <a:extLst>
+              <a:ext uri="{FF2B5EF4-FFF2-40B4-BE49-F238E27FC236}">
+                <a16:creationId xmlns:a16="http://schemas.microsoft.com/office/drawing/2014/main" id="{6DB07650-9583-E6C0-AC54-653E6518CBAF}"/>
+              </a:ext>
+            </a:extLst>
+          </p:cNvPr>
+          <p:cNvSpPr txBox="1"/>
+          <p:nvPr/>
+        </p:nvSpPr>
+        <p:spPr>
+          <a:xfrm>
+            <a:off x="3638" y="5157192"/>
+            <a:ext cx="12192000" cy="646331"/>
+          </a:xfrm>
+          <a:prstGeom prst="rect">
+            <a:avLst/>
+          </a:prstGeom>
+          <a:noFill/>
+        </p:spPr>
+        <p:txBody>
+          <a:bodyPr wrap="square" rtlCol="0">
+            <a:spAutoFit/>
+          </a:bodyPr>
+          <a:lstStyle/>
+          <a:p>
+            <a:pPr algn="ctr"/>
+            <a:r>
+              <a:rPr lang="en-US" sz="3600" b="1" dirty="0">
+                <a:solidFill>
+                  <a:srgbClr val="660033"/>
+                </a:solidFill>
+                <a:latin typeface="Microsoft JhengHei" panose="020B0604030504040204" pitchFamily="34" charset="-120"/>
+                <a:ea typeface="Microsoft JhengHei" panose="020B0604030504040204" pitchFamily="34" charset="-120"/>
+              </a:rPr>
+              <a:t>( </a:t>
+            </a:r>
+            <a:r>
+              <a:rPr lang="zh-CN" altLang="en-US" sz="3600" b="1" dirty="0">
+                <a:solidFill>
+                  <a:srgbClr val="660033"/>
+                </a:solidFill>
+                <a:latin typeface="Microsoft JhengHei" panose="020B0604030504040204" pitchFamily="34" charset="-120"/>
+                <a:ea typeface="Microsoft JhengHei" panose="020B0604030504040204" pitchFamily="34" charset="-120"/>
+              </a:rPr>
+              <a:t>副歌</a:t>
+            </a:r>
+            <a:r>
+              <a:rPr lang="en-US" sz="3600" b="1" dirty="0">
+                <a:solidFill>
+                  <a:srgbClr val="660033"/>
+                </a:solidFill>
+                <a:latin typeface="Microsoft JhengHei" panose="020B0604030504040204" pitchFamily="34" charset="-120"/>
+                <a:ea typeface="Microsoft JhengHei" panose="020B0604030504040204" pitchFamily="34" charset="-120"/>
+              </a:rPr>
+              <a:t> )</a:t>
+            </a:r>
+            <a:endParaRPr lang="vi-VN" sz="3600" b="1" dirty="0">
+              <a:solidFill>
+                <a:srgbClr val="660033"/>
+              </a:solidFill>
+              <a:ea typeface="Microsoft JhengHei" panose="020B0604030504040204" pitchFamily="34" charset="-120"/>
+            </a:endParaRPr>
+          </a:p>
+        </p:txBody>
+      </p:sp>
     </p:spTree>
     <p:extLst>
       <p:ext uri="{BB962C8B-B14F-4D97-AF65-F5344CB8AC3E}">
-        <p14:creationId xmlns="" xmlns:p14="http://schemas.microsoft.com/office/powerpoint/2010/main" val="4152005013"/>
+        <p14:creationId xmlns:p14="http://schemas.microsoft.com/office/powerpoint/2010/main" val="4152005013"/>
       </p:ext>
     </p:extLst>
   </p:cSld>
@@ -4588,20 +3899,10 @@
                 <a:latin typeface="微軟正黑體" pitchFamily="34" charset="-120"/>
                 <a:ea typeface="微軟正黑體" pitchFamily="34" charset="-120"/>
               </a:rPr>
-              <a:t>耶穌無人</a:t>
-            </a:r>
-            <a:r>
-              <a:rPr lang="zh-TW" altLang="en-US" sz="6400" b="1" dirty="0" smtClean="0">
-                <a:solidFill>
-                  <a:srgbClr val="660033"/>
-                </a:solidFill>
-                <a:latin typeface="微軟正黑體" pitchFamily="34" charset="-120"/>
-                <a:ea typeface="微軟正黑體" pitchFamily="34" charset="-120"/>
-              </a:rPr>
-              <a:t>與</a:t>
-            </a:r>
-            <a:r>
-              <a:rPr lang="zh-CN" altLang="en-US" sz="6400" b="1" dirty="0" smtClean="0">
+              <a:t>耶穌無人與</a:t>
+            </a:r>
+            <a:r>
+              <a:rPr lang="zh-CN" altLang="en-US" sz="6400" b="1" dirty="0">
                 <a:solidFill>
                   <a:srgbClr val="660033"/>
                 </a:solidFill>
@@ -4611,7 +3912,7 @@
               <a:t>祢</a:t>
             </a:r>
             <a:r>
-              <a:rPr lang="zh-TW" altLang="en-US" sz="6400" b="1" dirty="0" smtClean="0">
+              <a:rPr lang="zh-TW" altLang="en-US" sz="6400" b="1" dirty="0">
                 <a:solidFill>
                   <a:srgbClr val="660033"/>
                 </a:solidFill>
@@ -4620,12 +3921,73 @@
               </a:rPr>
               <a:t>相比</a:t>
             </a:r>
-            <a:endParaRPr lang="zh-TW" altLang="en-US" sz="6400" b="1" dirty="0">
+          </a:p>
+        </p:txBody>
+      </p:sp>
+      <p:sp>
+        <p:nvSpPr>
+          <p:cNvPr id="2" name="TextBox 1">
+            <a:extLst>
+              <a:ext uri="{FF2B5EF4-FFF2-40B4-BE49-F238E27FC236}">
+                <a16:creationId xmlns:a16="http://schemas.microsoft.com/office/drawing/2014/main" id="{DFF05D61-14D7-CE36-7B0C-6D76066D71F3}"/>
+              </a:ext>
+            </a:extLst>
+          </p:cNvPr>
+          <p:cNvSpPr txBox="1"/>
+          <p:nvPr/>
+        </p:nvSpPr>
+        <p:spPr>
+          <a:xfrm>
+            <a:off x="3638" y="5157192"/>
+            <a:ext cx="12192000" cy="646331"/>
+          </a:xfrm>
+          <a:prstGeom prst="rect">
+            <a:avLst/>
+          </a:prstGeom>
+          <a:noFill/>
+        </p:spPr>
+        <p:txBody>
+          <a:bodyPr wrap="square" rtlCol="0">
+            <a:spAutoFit/>
+          </a:bodyPr>
+          <a:lstStyle/>
+          <a:p>
+            <a:pPr algn="ctr"/>
+            <a:r>
+              <a:rPr lang="en-US" sz="3600" b="1" dirty="0">
+                <a:solidFill>
+                  <a:srgbClr val="660033"/>
+                </a:solidFill>
+                <a:latin typeface="Microsoft JhengHei" panose="020B0604030504040204" pitchFamily="34" charset="-120"/>
+                <a:ea typeface="Microsoft JhengHei" panose="020B0604030504040204" pitchFamily="34" charset="-120"/>
+              </a:rPr>
+              <a:t>( </a:t>
+            </a:r>
+            <a:r>
+              <a:rPr lang="zh-CN" altLang="en-US" sz="3600" b="1" dirty="0">
+                <a:solidFill>
+                  <a:srgbClr val="660033"/>
+                </a:solidFill>
+                <a:latin typeface="Microsoft JhengHei" panose="020B0604030504040204" pitchFamily="34" charset="-120"/>
+                <a:ea typeface="Microsoft JhengHei" panose="020B0604030504040204" pitchFamily="34" charset="-120"/>
+              </a:rPr>
+              <a:t>副歌</a:t>
+            </a:r>
+            <a:r>
+              <a:rPr lang="en-US" sz="3600" b="1" dirty="0">
+                <a:solidFill>
+                  <a:srgbClr val="660033"/>
+                </a:solidFill>
+                <a:latin typeface="Microsoft JhengHei" panose="020B0604030504040204" pitchFamily="34" charset="-120"/>
+                <a:ea typeface="Microsoft JhengHei" panose="020B0604030504040204" pitchFamily="34" charset="-120"/>
+              </a:rPr>
+              <a:t> )</a:t>
+            </a:r>
+            <a:endParaRPr lang="vi-VN" sz="3600" b="1" dirty="0">
               <a:solidFill>
                 <a:srgbClr val="660033"/>
               </a:solidFill>
-              <a:latin typeface="微軟正黑體" pitchFamily="34" charset="-120"/>
-              <a:ea typeface="微軟正黑體" pitchFamily="34" charset="-120"/>
+              <a:ea typeface="Microsoft JhengHei" panose="020B0604030504040204" pitchFamily="34" charset="-120"/>
             </a:endParaRPr>
           </a:p>
         </p:txBody>
@@ -4633,370 +3995,7 @@
     </p:spTree>
     <p:extLst>
       <p:ext uri="{BB962C8B-B14F-4D97-AF65-F5344CB8AC3E}">
-        <p14:creationId xmlns="" xmlns:p14="http://schemas.microsoft.com/office/powerpoint/2010/main" val="714244842"/>
-      </p:ext>
-    </p:extLst>
-  </p:cSld>
-  <p:clrMapOvr>
-    <a:masterClrMapping/>
-  </p:clrMapOvr>
-</p:sld>
-</file>
-
-<file path=ppt/slides/slide7.xml><?xml version="1.0" encoding="utf-8"?>
-<p:sld xmlns:a="http://schemas.openxmlformats.org/drawingml/2006/main" xmlns:r="http://schemas.openxmlformats.org/officeDocument/2006/relationships" xmlns:p="http://schemas.openxmlformats.org/presentationml/2006/main">
-  <p:cSld>
-    <p:spTree>
-      <p:nvGrpSpPr>
-        <p:cNvPr id="1" name=""/>
-        <p:cNvGrpSpPr/>
-        <p:nvPr/>
-      </p:nvGrpSpPr>
-      <p:grpSpPr>
-        <a:xfrm>
-          <a:off x="0" y="0"/>
-          <a:ext cx="0" cy="0"/>
-          <a:chOff x="0" y="0"/>
-          <a:chExt cx="0" cy="0"/>
-        </a:xfrm>
-      </p:grpSpPr>
-      <p:sp>
-        <p:nvSpPr>
-          <p:cNvPr id="4" name="標題 3"/>
-          <p:cNvSpPr>
-            <a:spLocks noGrp="1"/>
-          </p:cNvSpPr>
-          <p:nvPr>
-            <p:ph type="title"/>
-          </p:nvPr>
-        </p:nvSpPr>
-        <p:spPr>
-          <a:xfrm>
-            <a:off x="0" y="2857513"/>
-            <a:ext cx="12192000" cy="1143000"/>
-          </a:xfrm>
-        </p:spPr>
-        <p:txBody>
-          <a:bodyPr>
-            <a:noAutofit/>
-          </a:bodyPr>
-          <a:lstStyle/>
-          <a:p>
-            <a:r>
-              <a:rPr lang="zh-CN" altLang="en-US" sz="7200" b="1" i="1" dirty="0">
-                <a:solidFill>
-                  <a:srgbClr val="660033"/>
-                </a:solidFill>
-                <a:effectLst>
-                  <a:outerShdw blurRad="38100" dist="38100" dir="2700000" algn="tl">
-                    <a:srgbClr val="000000">
-                      <a:alpha val="43137"/>
-                    </a:srgbClr>
-                  </a:outerShdw>
-                </a:effectLst>
-                <a:latin typeface="微軟正黑體" pitchFamily="34" charset="-120"/>
-                <a:ea typeface="微軟正黑體" pitchFamily="34" charset="-120"/>
-              </a:rPr>
-              <a:t>唯有耶穌</a:t>
-            </a:r>
-            <a:endParaRPr lang="zh-TW" altLang="en-US" sz="7200" b="1" i="1" dirty="0">
-              <a:solidFill>
-                <a:srgbClr val="660033"/>
-              </a:solidFill>
-              <a:effectLst>
-                <a:outerShdw blurRad="38100" dist="38100" dir="2700000" algn="tl">
-                  <a:srgbClr val="000000">
-                    <a:alpha val="43137"/>
-                  </a:srgbClr>
-                </a:outerShdw>
-              </a:effectLst>
-              <a:latin typeface="微軟正黑體" pitchFamily="34" charset="-120"/>
-              <a:ea typeface="微軟正黑體" pitchFamily="34" charset="-120"/>
-            </a:endParaRPr>
-          </a:p>
-        </p:txBody>
-      </p:sp>
-    </p:spTree>
-    <p:extLst>
-      <p:ext uri="{BB962C8B-B14F-4D97-AF65-F5344CB8AC3E}">
-        <p14:creationId xmlns="" xmlns:p14="http://schemas.microsoft.com/office/powerpoint/2010/main" val="2765166867"/>
-      </p:ext>
-    </p:extLst>
-  </p:cSld>
-  <p:clrMapOvr>
-    <a:masterClrMapping/>
-  </p:clrMapOvr>
-</p:sld>
-</file>
-
-<file path=ppt/slides/slide8.xml><?xml version="1.0" encoding="utf-8"?>
-<p:sld xmlns:a="http://schemas.openxmlformats.org/drawingml/2006/main" xmlns:r="http://schemas.openxmlformats.org/officeDocument/2006/relationships" xmlns:p="http://schemas.openxmlformats.org/presentationml/2006/main">
-  <p:cSld>
-    <p:spTree>
-      <p:nvGrpSpPr>
-        <p:cNvPr id="1" name=""/>
-        <p:cNvGrpSpPr/>
-        <p:nvPr/>
-      </p:nvGrpSpPr>
-      <p:grpSpPr>
-        <a:xfrm>
-          <a:off x="0" y="0"/>
-          <a:ext cx="0" cy="0"/>
-          <a:chOff x="0" y="0"/>
-          <a:chExt cx="0" cy="0"/>
-        </a:xfrm>
-      </p:grpSpPr>
-      <p:sp>
-        <p:nvSpPr>
-          <p:cNvPr id="5" name="內容版面配置區 4"/>
-          <p:cNvSpPr>
-            <a:spLocks noGrp="1"/>
-          </p:cNvSpPr>
-          <p:nvPr>
-            <p:ph idx="1"/>
-          </p:nvPr>
-        </p:nvSpPr>
-        <p:spPr>
-          <a:xfrm>
-            <a:off x="0" y="2084853"/>
-            <a:ext cx="12192000" cy="2404863"/>
-          </a:xfrm>
-        </p:spPr>
-        <p:txBody>
-          <a:bodyPr anchor="ctr">
-            <a:normAutofit/>
-          </a:bodyPr>
-          <a:lstStyle/>
-          <a:p>
-            <a:pPr algn="ctr">
-              <a:buNone/>
-            </a:pPr>
-            <a:r>
-              <a:rPr lang="zh-TW" altLang="en-US" sz="6400" b="1" dirty="0" smtClean="0">
-                <a:solidFill>
-                  <a:srgbClr val="660033"/>
-                </a:solidFill>
-                <a:latin typeface="微軟正黑體" pitchFamily="34" charset="-120"/>
-                <a:ea typeface="微軟正黑體" pitchFamily="34" charset="-120"/>
-              </a:rPr>
-              <a:t>耶穌</a:t>
-            </a:r>
-            <a:r>
-              <a:rPr lang="zh-CN" altLang="en-US" sz="6400" b="1" dirty="0" smtClean="0">
-                <a:solidFill>
-                  <a:srgbClr val="660033"/>
-                </a:solidFill>
-                <a:latin typeface="微軟正黑體" pitchFamily="34" charset="-120"/>
-                <a:ea typeface="微軟正黑體" pitchFamily="34" charset="-120"/>
-              </a:rPr>
-              <a:t>祢</a:t>
-            </a:r>
-            <a:r>
-              <a:rPr lang="zh-TW" altLang="en-US" sz="6400" b="1" dirty="0" smtClean="0">
-                <a:solidFill>
-                  <a:srgbClr val="660033"/>
-                </a:solidFill>
-                <a:latin typeface="微軟正黑體" pitchFamily="34" charset="-120"/>
-                <a:ea typeface="微軟正黑體" pitchFamily="34" charset="-120"/>
-              </a:rPr>
-              <a:t>能</a:t>
-            </a:r>
-            <a:r>
-              <a:rPr lang="zh-TW" altLang="en-US" sz="6400" b="1" dirty="0">
-                <a:solidFill>
-                  <a:srgbClr val="660033"/>
-                </a:solidFill>
-                <a:latin typeface="微軟正黑體" pitchFamily="34" charset="-120"/>
-                <a:ea typeface="微軟正黑體" pitchFamily="34" charset="-120"/>
-              </a:rPr>
-              <a:t>使瞎眼看見</a:t>
-            </a:r>
-            <a:endParaRPr lang="en-US" altLang="zh-TW" sz="6400" b="1" dirty="0">
-              <a:solidFill>
-                <a:srgbClr val="660033"/>
-              </a:solidFill>
-              <a:latin typeface="微軟正黑體" pitchFamily="34" charset="-120"/>
-              <a:ea typeface="微軟正黑體" pitchFamily="34" charset="-120"/>
-            </a:endParaRPr>
-          </a:p>
-          <a:p>
-            <a:pPr algn="ctr">
-              <a:buNone/>
-            </a:pPr>
-            <a:r>
-              <a:rPr lang="zh-TW" altLang="en-US" sz="6400" b="1" dirty="0" smtClean="0">
-                <a:solidFill>
-                  <a:srgbClr val="660033"/>
-                </a:solidFill>
-                <a:latin typeface="微軟正黑體" pitchFamily="34" charset="-120"/>
-                <a:ea typeface="微軟正黑體" pitchFamily="34" charset="-120"/>
-              </a:rPr>
-              <a:t>耶穌</a:t>
-            </a:r>
-            <a:r>
-              <a:rPr lang="zh-CN" altLang="en-US" sz="6400" b="1" dirty="0" smtClean="0">
-                <a:solidFill>
-                  <a:srgbClr val="660033"/>
-                </a:solidFill>
-                <a:latin typeface="微軟正黑體" pitchFamily="34" charset="-120"/>
-                <a:ea typeface="微軟正黑體" pitchFamily="34" charset="-120"/>
-              </a:rPr>
-              <a:t>祢</a:t>
-            </a:r>
-            <a:r>
-              <a:rPr lang="zh-TW" altLang="en-US" sz="6400" b="1" dirty="0" smtClean="0">
-                <a:solidFill>
-                  <a:srgbClr val="660033"/>
-                </a:solidFill>
-                <a:latin typeface="微軟正黑體" pitchFamily="34" charset="-120"/>
-                <a:ea typeface="微軟正黑體" pitchFamily="34" charset="-120"/>
-              </a:rPr>
-              <a:t>能</a:t>
-            </a:r>
-            <a:r>
-              <a:rPr lang="zh-TW" altLang="en-US" sz="6400" b="1" dirty="0">
-                <a:solidFill>
-                  <a:srgbClr val="660033"/>
-                </a:solidFill>
-                <a:latin typeface="微軟正黑體" pitchFamily="34" charset="-120"/>
-                <a:ea typeface="微軟正黑體" pitchFamily="34" charset="-120"/>
-              </a:rPr>
-              <a:t>醫治傷心人</a:t>
-            </a:r>
-            <a:endParaRPr lang="en-US" altLang="zh-TW" sz="6400" b="1" dirty="0">
-              <a:solidFill>
-                <a:srgbClr val="660033"/>
-              </a:solidFill>
-              <a:latin typeface="微軟正黑體" pitchFamily="34" charset="-120"/>
-              <a:ea typeface="微軟正黑體" pitchFamily="34" charset="-120"/>
-            </a:endParaRPr>
-          </a:p>
-        </p:txBody>
-      </p:sp>
-    </p:spTree>
-    <p:extLst>
-      <p:ext uri="{BB962C8B-B14F-4D97-AF65-F5344CB8AC3E}">
-        <p14:creationId xmlns="" xmlns:p14="http://schemas.microsoft.com/office/powerpoint/2010/main" val="1873981163"/>
-      </p:ext>
-    </p:extLst>
-  </p:cSld>
-  <p:clrMapOvr>
-    <a:masterClrMapping/>
-  </p:clrMapOvr>
-</p:sld>
-</file>
-
-<file path=ppt/slides/slide9.xml><?xml version="1.0" encoding="utf-8"?>
-<p:sld xmlns:a="http://schemas.openxmlformats.org/drawingml/2006/main" xmlns:r="http://schemas.openxmlformats.org/officeDocument/2006/relationships" xmlns:p="http://schemas.openxmlformats.org/presentationml/2006/main">
-  <p:cSld>
-    <p:spTree>
-      <p:nvGrpSpPr>
-        <p:cNvPr id="1" name=""/>
-        <p:cNvGrpSpPr/>
-        <p:nvPr/>
-      </p:nvGrpSpPr>
-      <p:grpSpPr>
-        <a:xfrm>
-          <a:off x="0" y="0"/>
-          <a:ext cx="0" cy="0"/>
-          <a:chOff x="0" y="0"/>
-          <a:chExt cx="0" cy="0"/>
-        </a:xfrm>
-      </p:grpSpPr>
-      <p:sp>
-        <p:nvSpPr>
-          <p:cNvPr id="5" name="內容版面配置區 4"/>
-          <p:cNvSpPr>
-            <a:spLocks noGrp="1"/>
-          </p:cNvSpPr>
-          <p:nvPr>
-            <p:ph idx="1"/>
-          </p:nvPr>
-        </p:nvSpPr>
-        <p:spPr>
-          <a:xfrm>
-            <a:off x="0" y="2084853"/>
-            <a:ext cx="12192000" cy="2404863"/>
-          </a:xfrm>
-        </p:spPr>
-        <p:txBody>
-          <a:bodyPr anchor="ctr">
-            <a:normAutofit/>
-          </a:bodyPr>
-          <a:lstStyle/>
-          <a:p>
-            <a:pPr algn="ctr">
-              <a:buNone/>
-            </a:pPr>
-            <a:r>
-              <a:rPr lang="zh-TW" altLang="en-US" sz="6400" b="1" dirty="0" smtClean="0">
-                <a:solidFill>
-                  <a:srgbClr val="660033"/>
-                </a:solidFill>
-                <a:latin typeface="微軟正黑體" pitchFamily="34" charset="-120"/>
-                <a:ea typeface="微軟正黑體" pitchFamily="34" charset="-120"/>
-              </a:rPr>
-              <a:t>耶穌</a:t>
-            </a:r>
-            <a:r>
-              <a:rPr lang="zh-CN" altLang="en-US" sz="6400" b="1" dirty="0" smtClean="0">
-                <a:solidFill>
-                  <a:srgbClr val="660033"/>
-                </a:solidFill>
-                <a:latin typeface="微軟正黑體" pitchFamily="34" charset="-120"/>
-                <a:ea typeface="微軟正黑體" pitchFamily="34" charset="-120"/>
-              </a:rPr>
-              <a:t>祢</a:t>
-            </a:r>
-            <a:r>
-              <a:rPr lang="zh-TW" altLang="en-US" sz="6400" b="1" dirty="0" smtClean="0">
-                <a:solidFill>
-                  <a:srgbClr val="660033"/>
-                </a:solidFill>
-                <a:latin typeface="微軟正黑體" pitchFamily="34" charset="-120"/>
-                <a:ea typeface="微軟正黑體" pitchFamily="34" charset="-120"/>
-              </a:rPr>
-              <a:t>有</a:t>
-            </a:r>
-            <a:r>
-              <a:rPr lang="zh-TW" altLang="en-US" sz="6400" b="1" dirty="0">
-                <a:solidFill>
-                  <a:srgbClr val="660033"/>
-                </a:solidFill>
-                <a:latin typeface="微軟正黑體" pitchFamily="34" charset="-120"/>
-                <a:ea typeface="微軟正黑體" pitchFamily="34" charset="-120"/>
-              </a:rPr>
-              <a:t>權柄釋放</a:t>
-            </a:r>
-            <a:endParaRPr lang="en-US" altLang="zh-TW" sz="6400" b="1" dirty="0">
-              <a:solidFill>
-                <a:srgbClr val="660033"/>
-              </a:solidFill>
-              <a:latin typeface="微軟正黑體" pitchFamily="34" charset="-120"/>
-              <a:ea typeface="微軟正黑體" pitchFamily="34" charset="-120"/>
-            </a:endParaRPr>
-          </a:p>
-          <a:p>
-            <a:pPr algn="ctr">
-              <a:buNone/>
-            </a:pPr>
-            <a:r>
-              <a:rPr lang="zh-TW" altLang="en-US" sz="6400" b="1" dirty="0">
-                <a:solidFill>
-                  <a:srgbClr val="660033"/>
-                </a:solidFill>
-                <a:latin typeface="微軟正黑體" pitchFamily="34" charset="-120"/>
-                <a:ea typeface="微軟正黑體" pitchFamily="34" charset="-120"/>
-              </a:rPr>
-              <a:t>叫不可能變為可能</a:t>
-            </a:r>
-          </a:p>
-        </p:txBody>
-      </p:sp>
-    </p:spTree>
-    <p:extLst>
-      <p:ext uri="{BB962C8B-B14F-4D97-AF65-F5344CB8AC3E}">
-        <p14:creationId xmlns="" xmlns:p14="http://schemas.microsoft.com/office/powerpoint/2010/main" val="1283900834"/>
+        <p14:creationId xmlns:p14="http://schemas.microsoft.com/office/powerpoint/2010/main" val="714244842"/>
       </p:ext>
     </p:extLst>
   </p:cSld>
